--- a/10-Knowledge-Products/KP1-GEA/videos/module_5/en/decks/KP1_M5_5.2_Deck_v0.2.pptx
+++ b/10-Knowledge-Products/KP1-GEA/videos/module_5/en/decks/KP1_M5_5.2_Deck_v0.2.pptx
@@ -14,13 +14,13 @@
     <p:handoutMasterId r:id="rId47"/>
   </p:handoutMasterIdLst>
   <p:sldIdLst>
-    <p:sldId id="2681" r:id="rId8"/>
-    <p:sldId id="2703" r:id="rId25"/>
     <p:sldId id="2704" r:id="rId26"/>
     <p:sldId id="2705" r:id="rId27"/>
     <p:sldId id="2706" r:id="rId28"/>
     <p:sldId id="2707" r:id="rId29"/>
     <p:sldId id="2708" r:id="rId30"/>
+    <p:sldId id="2709" r:id="rId31"/>
+    <p:sldId id="2710" r:id="rId32"/>
   </p:sldIdLst>
   <p:sldSz cx="12192000" cy="6858000"/>
   <p:notesSz cx="6858000" cy="9144000"/>
@@ -887,88 +887,6 @@
 </p:notesMaster>
 </file>
 
-<file path=ppt/notesSlides/notesSlide10.xml><?xml version="1.0" encoding="utf-8"?>
-<p:notes xmlns:a="http://schemas.openxmlformats.org/drawingml/2006/main" xmlns:p="http://schemas.openxmlformats.org/presentationml/2006/main" xmlns:r="http://schemas.openxmlformats.org/officeDocument/2006/relationships">
-  <p:cSld>
-    <p:spTree>
-      <p:nvGrpSpPr>
-        <p:cNvPr id="1" name=""/>
-        <p:cNvGrpSpPr/>
-        <p:nvPr/>
-      </p:nvGrpSpPr>
-      <p:grpSpPr>
-        <a:xfrm>
-          <a:off x="0" y="0"/>
-          <a:ext cx="0" cy="0"/>
-          <a:chOff x="0" y="0"/>
-          <a:chExt cx="0" cy="0"/>
-        </a:xfrm>
-      </p:grpSpPr>
-      <p:sp>
-        <p:nvSpPr>
-          <p:cNvPr id="2" name="Slide Image Placeholder 1"/>
-          <p:cNvSpPr>
-            <a:spLocks noGrp="1"/>
-          </p:cNvSpPr>
-          <p:nvPr>
-            <p:ph type="sldImg" idx="2"/>
-          </p:nvPr>
-        </p:nvSpPr>
-        <p:spPr/>
-      </p:sp>
-      <p:sp>
-        <p:nvSpPr>
-          <p:cNvPr id="3" name="Notes Placeholder 2"/>
-          <p:cNvSpPr>
-            <a:spLocks noGrp="1"/>
-          </p:cNvSpPr>
-          <p:nvPr>
-            <p:ph type="body" idx="3" sz="quarter"/>
-          </p:nvPr>
-        </p:nvSpPr>
-        <p:spPr/>
-        <p:txBody>
-          <a:bodyPr/>
-          <a:lstStyle/>
-          <a:p>
-            <a:r>
-              <a:t>VO, slide 1: If the evidence shows what works, it also shows why programmes fail — and the failures are almost never technical. What works is known: a protected team, a framework agencies adopt, governance that can say no, funding sustained for years. The killers are the harder half.</a:t>
-            </a:r>
-          </a:p>
-          <a:p/>
-          <a:p>
-            <a:r>
-              <a:t>Retrieval prompt — ask before playing on: name the ways a programme like this dies. Are any of them technical? Answer on the next two slides.</a:t>
-            </a:r>
-          </a:p>
-          <a:p/>
-          <a:p>
-            <a:r>
-              <a:t>The four success factors are named in this opener only; the v0.2 script gives them no slide of their own.</a:t>
-            </a:r>
-          </a:p>
-        </p:txBody>
-      </p:sp>
-      <p:sp>
-        <p:nvSpPr>
-          <p:cNvPr id="4" name="Slide Number Placeholder 3"/>
-          <p:cNvSpPr>
-            <a:spLocks noGrp="1"/>
-          </p:cNvSpPr>
-          <p:nvPr>
-            <p:ph type="sldNum" idx="5" sz="quarter"/>
-          </p:nvPr>
-        </p:nvSpPr>
-        <p:spPr/>
-      </p:sp>
-    </p:spTree>
-  </p:cSld>
-  <p:clrMapOvr>
-    <a:masterClrMapping/>
-  </p:clrMapOvr>
-</p:notes>
-</file>
-
 <file path=ppt/notesSlides/notesSlide11.xml><?xml version="1.0" encoding="utf-8"?>
 <p:notes xmlns:a="http://schemas.openxmlformats.org/drawingml/2006/main" xmlns:p="http://schemas.openxmlformats.org/presentationml/2006/main" xmlns:r="http://schemas.openxmlformats.org/officeDocument/2006/relationships">
   <p:cSld>
@@ -1014,13 +932,7 @@
           <a:lstStyle/>
           <a:p>
             <a:r>
-              <a:t>VO: Now the failures, because forewarned is forearmed. The team gets pulled onto the flagship project that is in trouble, and the architecture work stops. The minister or director-general who championed it moves on, and the successor has their own priorities. The governance board, under delivery pressure, lets one powerful project through, then another, until its "no" means nothing. And the funding, never secured as a multi-year commitment, quietly becomes an annual favour that one budget cycle removes. None of these is dramatic. Each is a slow fade, usually in the second year.</a:t>
-            </a:r>
-          </a:p>
-          <a:p/>
-          <a:p>
-            <a:r>
-              <a:t>Production cue: this slide and the next answer the retrieval prompt set on the title slide.</a:t>
+              <a:t>Title card — the cold open. The hosts name the module, the video number, the title and the single message on this slide; no scripted narration. Hold until the opener begins; the opener is narrated on the next slide.</a:t>
             </a:r>
           </a:p>
         </p:txBody>
@@ -1090,13 +1002,19 @@
           <a:lstStyle/>
           <a:p>
             <a:r>
-              <a:t>VO: Notice what every one of those killers has in common. Not one is about technology. They are about people, authority and money — protecting the team, securing the mandate, defending the governance, locking in the funding. And that is the good news, because those are exactly the things you, as the one making the case upward, can influence. The chief architect cannot protect their own team or secure their own five-year budget. Only the strategist who commissioned the work can. The failures are organisational, which means they are yours to prevent.</a:t>
+              <a:t>VO: If the evidence shows what works, it also shows why programmes fail — and the failures are almost never technical. What works is known: a protected team, a framework agencies adopt, governance that can say no, funding sustained for years. The killers are the harder half.</a:t>
             </a:r>
           </a:p>
           <a:p/>
           <a:p>
             <a:r>
-              <a:t>Production cue: the pivotal reframe of this video, and it closes the retrieval prompt. Hold it a beat longer.</a:t>
+              <a:t>Retrieval prompt — ask before playing on: name the ways a programme like this dies. Are any of them technical? Answer on the next two slides.</a:t>
+            </a:r>
+          </a:p>
+          <a:p/>
+          <a:p>
+            <a:r>
+              <a:t>The four success factors are named in this opener only; the v0.2 script gives them no slide of their own.</a:t>
             </a:r>
           </a:p>
         </p:txBody>
@@ -1166,7 +1084,13 @@
           <a:lstStyle/>
           <a:p>
             <a:r>
-              <a:t>VO: So design for the second year now, while you have the minister's attention. Get the team's protection in writing. Make the governance mandate legal, not just a memo. Secure a multi-year funding envelope, not an annual line. And plan to re-commit all of it when the sponsor changes, because the next minister will not feel bound by the last one's promises. These are not afterthoughts to add if the programme survives. They are how it survives. Build them in at the start, and you have designed out the four most common ways these programmes die.</a:t>
+              <a:t>VO: Now the failures, because forewarned is forearmed. The team gets pulled onto the flagship project that is in trouble, and the architecture work stops. The minister or director-general who championed it moves on, and the successor has their own priorities. The governance board, under delivery pressure, lets one powerful project through, then another, until its "no" means nothing. And the funding, never secured as a multi-year commitment, quietly becomes an annual favour that one budget cycle removes. None of these is dramatic. Each is a slow fade, usually in the second year.</a:t>
+            </a:r>
+          </a:p>
+          <a:p/>
+          <a:p>
+            <a:r>
+              <a:t>Production cue: this slide and the next answer the retrieval prompt set on the title slide.</a:t>
             </a:r>
           </a:p>
         </p:txBody>
@@ -1236,13 +1160,13 @@
           <a:lstStyle/>
           <a:p>
             <a:r>
-              <a:t>PRACTICE BOX (on-screen only — never read it, never paraphrase it, never point at it). It replaces the narrated handoff: this video ends on the recap and the Sources slide.</a:t>
+              <a:t>VO: Notice what every one of those killers has in common. Not one is about technology. They are about people, authority and money — protecting the team, securing the mandate, defending the governance, locking in the funding. And that is the good news, because those are exactly the things you, as the one making the case upward, can influence. The chief architect cannot protect their own team or secure their own five-year budget. Only the strategist who commissioned the work can. The failures are organisational, which means they are yours to prevent.</a:t>
             </a:r>
           </a:p>
           <a:p/>
           <a:p>
             <a:r>
-              <a:t>VO: So the evidence gives you two lists: what to build in, and the four organisational failures to design out. A programme designed to survive its own second year is the one that delivers.</a:t>
+              <a:t>Production cue: the pivotal reframe of this video, and it closes the retrieval prompt. Hold it a beat longer.</a:t>
             </a:r>
           </a:p>
         </p:txBody>
@@ -1312,7 +1236,7 @@
           <a:lstStyle/>
           <a:p>
             <a:r>
-              <a:t>Sources slide, held ~5 seconds at the end of the video. Links are compiled into the YouTube description per ITU convention; no URLs read aloud.</a:t>
+              <a:t>VO: So design for the second year now, while you have the minister's attention. Get the team's protection in writing. Make the governance mandate legal, not just a memo. Secure a multi-year funding envelope, not an annual line. And plan to re-commit all of it when the sponsor changes, because the next minister will not feel bound by the last one's promises. These are not afterthoughts to add if the programme survives. They are how it survives. Build them in at the start, and you have designed out the four most common ways these programmes die.</a:t>
             </a:r>
           </a:p>
         </p:txBody>
@@ -1337,7 +1261,7 @@
 </p:notes>
 </file>
 
-<file path=ppt/notesSlides/notesSlide21.xml><?xml version="1.0" encoding="utf-8"?>
+<file path=ppt/notesSlides/notesSlide16.xml><?xml version="1.0" encoding="utf-8"?>
 <p:notes xmlns:a="http://schemas.openxmlformats.org/drawingml/2006/main" xmlns:p="http://schemas.openxmlformats.org/presentationml/2006/main" xmlns:r="http://schemas.openxmlformats.org/officeDocument/2006/relationships">
   <p:cSld>
     <p:spTree>
@@ -1382,7 +1306,83 @@
           <a:lstStyle/>
           <a:p>
             <a:r>
-              <a:t>Title card for standalone video 5.2. Content slides are identical to the corresponding section of the combined deck KP1_M5_Deck_v0.2.pptx; voice-over is in each slide’s notes.</a:t>
+              <a:t>PRACTICE BOX (on-screen only — never read it, never paraphrase it, never point at it). It replaces the narrated handoff: this video ends on the recap and the Sources slide.</a:t>
+            </a:r>
+          </a:p>
+          <a:p/>
+          <a:p>
+            <a:r>
+              <a:t>VO: So the evidence gives you two lists: what to build in, and the four organisational failures to design out. A programme designed to survive its own second year is the one that delivers.</a:t>
+            </a:r>
+          </a:p>
+        </p:txBody>
+      </p:sp>
+      <p:sp>
+        <p:nvSpPr>
+          <p:cNvPr id="4" name="Slide Number Placeholder 3"/>
+          <p:cNvSpPr>
+            <a:spLocks noGrp="1"/>
+          </p:cNvSpPr>
+          <p:nvPr>
+            <p:ph type="sldNum" idx="5" sz="quarter"/>
+          </p:nvPr>
+        </p:nvSpPr>
+        <p:spPr/>
+      </p:sp>
+    </p:spTree>
+  </p:cSld>
+  <p:clrMapOvr>
+    <a:masterClrMapping/>
+  </p:clrMapOvr>
+</p:notes>
+</file>
+
+<file path=ppt/notesSlides/notesSlide17.xml><?xml version="1.0" encoding="utf-8"?>
+<p:notes xmlns:a="http://schemas.openxmlformats.org/drawingml/2006/main" xmlns:p="http://schemas.openxmlformats.org/presentationml/2006/main" xmlns:r="http://schemas.openxmlformats.org/officeDocument/2006/relationships">
+  <p:cSld>
+    <p:spTree>
+      <p:nvGrpSpPr>
+        <p:cNvPr id="1" name=""/>
+        <p:cNvGrpSpPr/>
+        <p:nvPr/>
+      </p:nvGrpSpPr>
+      <p:grpSpPr>
+        <a:xfrm>
+          <a:off x="0" y="0"/>
+          <a:ext cx="0" cy="0"/>
+          <a:chOff x="0" y="0"/>
+          <a:chExt cx="0" cy="0"/>
+        </a:xfrm>
+      </p:grpSpPr>
+      <p:sp>
+        <p:nvSpPr>
+          <p:cNvPr id="2" name="Slide Image Placeholder 1"/>
+          <p:cNvSpPr>
+            <a:spLocks noGrp="1"/>
+          </p:cNvSpPr>
+          <p:nvPr>
+            <p:ph type="sldImg" idx="2"/>
+          </p:nvPr>
+        </p:nvSpPr>
+        <p:spPr/>
+      </p:sp>
+      <p:sp>
+        <p:nvSpPr>
+          <p:cNvPr id="3" name="Notes Placeholder 2"/>
+          <p:cNvSpPr>
+            <a:spLocks noGrp="1"/>
+          </p:cNvSpPr>
+          <p:nvPr>
+            <p:ph type="body" idx="3" sz="quarter"/>
+          </p:nvPr>
+        </p:nvSpPr>
+        <p:spPr/>
+        <p:txBody>
+          <a:bodyPr/>
+          <a:lstStyle/>
+          <a:p>
+            <a:r>
+              <a:t>Sources slide, held ~5 seconds at the end of the video. Links are compiled into the YouTube description per ITU convention; no URLs read aloud.</a:t>
             </a:r>
           </a:p>
         </p:txBody>
@@ -11543,926 +11543,6 @@
 </p:sldMaster>
 </file>
 
-<file path=ppt/slides/slide1.xml><?xml version="1.0" encoding="utf-8"?>
-<p:sld xmlns:a="http://schemas.openxmlformats.org/drawingml/2006/main" xmlns:r="http://schemas.openxmlformats.org/officeDocument/2006/relationships" xmlns:p="http://schemas.openxmlformats.org/presentationml/2006/main">
-  <p:cSld>
-    <p:spTree>
-      <p:nvGrpSpPr>
-        <p:cNvPr id="1" name=""/>
-        <p:cNvGrpSpPr/>
-        <p:nvPr/>
-      </p:nvGrpSpPr>
-      <p:grpSpPr>
-        <a:xfrm>
-          <a:off x="0" y="0"/>
-          <a:ext cx="0" cy="0"/>
-          <a:chOff x="0" y="0"/>
-          <a:chExt cx="0" cy="0"/>
-        </a:xfrm>
-      </p:grpSpPr>
-      <p:cxnSp>
-        <p:nvCxnSpPr>
-          <p:cNvPr id="11" name="Straight Connector 10">
-            <a:extLst>
-              <a:ext uri="{FF2B5EF4-FFF2-40B4-BE49-F238E27FC236}">
-                <a16:creationId xmlns:a16="http://schemas.microsoft.com/office/drawing/2014/main" id="{D9AD66F2-F7C0-4D03-9150-D28F17AC561D}"/>
-              </a:ext>
-            </a:extLst>
-          </p:cNvPr>
-          <p:cNvCxnSpPr>
-            <a:cxnSpLocks/>
-          </p:cNvCxnSpPr>
-          <p:nvPr/>
-        </p:nvCxnSpPr>
-        <p:spPr>
-          <a:xfrm>
-            <a:off x="373021" y="2198718"/>
-            <a:ext cx="6843567" cy="0"/>
-          </a:xfrm>
-          <a:prstGeom prst="line">
-            <a:avLst/>
-          </a:prstGeom>
-          <a:ln w="12700">
-            <a:solidFill>
-              <a:srgbClr val="009CD6"/>
-            </a:solidFill>
-          </a:ln>
-        </p:spPr>
-        <p:style>
-          <a:lnRef idx="1">
-            <a:schemeClr val="accent1"/>
-          </a:lnRef>
-          <a:fillRef idx="0">
-            <a:schemeClr val="accent1"/>
-          </a:fillRef>
-          <a:effectRef idx="0">
-            <a:schemeClr val="accent1"/>
-          </a:effectRef>
-          <a:fontRef idx="minor">
-            <a:schemeClr val="tx1"/>
-          </a:fontRef>
-        </p:style>
-      </p:cxnSp>
-      <p:sp>
-        <p:nvSpPr>
-          <p:cNvPr id="12" name="Title 9">
-            <a:extLst>
-              <a:ext uri="{FF2B5EF4-FFF2-40B4-BE49-F238E27FC236}">
-                <a16:creationId xmlns:a16="http://schemas.microsoft.com/office/drawing/2014/main" id="{EEB08032-CE0E-4986-AEDF-A41026C0E8B9}"/>
-              </a:ext>
-            </a:extLst>
-          </p:cNvPr>
-          <p:cNvSpPr txBox="1">
-            <a:spLocks/>
-          </p:cNvSpPr>
-          <p:nvPr/>
-        </p:nvSpPr>
-        <p:spPr>
-          <a:xfrm>
-            <a:off x="237734" y="702833"/>
-            <a:ext cx="6432007" cy="1218817"/>
-          </a:xfrm>
-          <a:prstGeom prst="rect">
-            <a:avLst/>
-          </a:prstGeom>
-        </p:spPr>
-        <p:txBody>
-          <a:bodyPr anchor="b">
-            <a:noAutofit/>
-          </a:bodyPr>
-          <a:lstStyle>
-            <a:lvl1pPr algn="l" defTabSz="914400" rtl="0" eaLnBrk="1" latinLnBrk="0" hangingPunct="1">
-              <a:lnSpc>
-                <a:spcPct val="90000"/>
-              </a:lnSpc>
-              <a:spcBef>
-                <a:spcPct val="0"/>
-              </a:spcBef>
-              <a:buNone/>
-              <a:defRPr sz="4000" kern="1200">
-                <a:solidFill>
-                  <a:schemeClr val="bg1"/>
-                </a:solidFill>
-                <a:latin typeface="Arial" panose="020B0604020202020204" pitchFamily="34" charset="0"/>
-                <a:ea typeface="+mj-ea"/>
-                <a:cs typeface="Arial" panose="020B0604020202020204" pitchFamily="34" charset="0"/>
-              </a:defRPr>
-            </a:lvl1pPr>
-          </a:lstStyle>
-          <a:p>
-            <a:r>
-              <a:rPr sz="2400" b="1" i="0">
-                <a:solidFill>
-                  <a:srgbClr val="1A1A1A"/>
-                </a:solidFill>
-                <a:latin typeface="Arial"/>
-              </a:rPr>
-              <a:t>5.2 — What the evidence says works — and what quietly kills these programmes</a:t>
-            </a:r>
-          </a:p>
-        </p:txBody>
-      </p:sp>
-      <p:pic>
-        <p:nvPicPr>
-          <p:cNvPr id="7" name="Picture 6">
-            <a:extLst>
-              <a:ext uri="{FF2B5EF4-FFF2-40B4-BE49-F238E27FC236}">
-                <a16:creationId xmlns:a16="http://schemas.microsoft.com/office/drawing/2014/main" id="{A2066351-C569-4C4C-A096-308777FCDC32}"/>
-              </a:ext>
-            </a:extLst>
-          </p:cNvPr>
-          <p:cNvPicPr>
-            <a:picLocks noChangeAspect="1"/>
-          </p:cNvPicPr>
-          <p:nvPr/>
-        </p:nvPicPr>
-        <p:blipFill>
-          <a:blip r:embed="rId2">
-            <a:extLst>
-              <a:ext uri="{28A0092B-C50C-407E-A947-70E740481C1C}">
-                <a14:useLocalDpi xmlns:a14="http://schemas.microsoft.com/office/drawing/2010/main" val="0"/>
-              </a:ext>
-            </a:extLst>
-          </a:blip>
-          <a:srcRect t="20219" b="14729"/>
-          <a:stretch>
-            <a:fillRect/>
-          </a:stretch>
-        </p:blipFill>
-        <p:spPr>
-          <a:xfrm>
-            <a:off x="0" y="5620871"/>
-            <a:ext cx="1323975" cy="1218816"/>
-          </a:xfrm>
-          <a:prstGeom prst="rect">
-            <a:avLst/>
-          </a:prstGeom>
-        </p:spPr>
-      </p:pic>
-      <p:sp>
-        <p:nvSpPr>
-          <p:cNvPr id="14" name="Title 9">
-            <a:extLst>
-              <a:ext uri="{FF2B5EF4-FFF2-40B4-BE49-F238E27FC236}">
-                <a16:creationId xmlns:a16="http://schemas.microsoft.com/office/drawing/2014/main" id="{B5087B80-3EE4-1881-0130-ED58CA625092}"/>
-              </a:ext>
-            </a:extLst>
-          </p:cNvPr>
-          <p:cNvSpPr txBox="1">
-            <a:spLocks/>
-          </p:cNvSpPr>
-          <p:nvPr/>
-        </p:nvSpPr>
-        <p:spPr>
-          <a:xfrm>
-            <a:off x="284452" y="2475786"/>
-            <a:ext cx="6382893" cy="953213"/>
-          </a:xfrm>
-          <a:prstGeom prst="rect">
-            <a:avLst/>
-          </a:prstGeom>
-        </p:spPr>
-        <p:txBody>
-          <a:bodyPr anchor="t">
-            <a:noAutofit/>
-          </a:bodyPr>
-          <a:lstStyle>
-            <a:lvl1pPr algn="l" defTabSz="914400" rtl="0" eaLnBrk="1" latinLnBrk="0" hangingPunct="1">
-              <a:lnSpc>
-                <a:spcPct val="90000"/>
-              </a:lnSpc>
-              <a:spcBef>
-                <a:spcPct val="0"/>
-              </a:spcBef>
-              <a:buNone/>
-              <a:defRPr sz="4000" kern="1200">
-                <a:solidFill>
-                  <a:schemeClr val="bg1"/>
-                </a:solidFill>
-                <a:latin typeface="Arial" panose="020B0604020202020204" pitchFamily="34" charset="0"/>
-                <a:ea typeface="+mj-ea"/>
-                <a:cs typeface="Arial" panose="020B0604020202020204" pitchFamily="34" charset="0"/>
-              </a:defRPr>
-            </a:lvl1pPr>
-          </a:lstStyle>
-          <a:p>
-            <a:pPr marL="0" marR="0" lvl="0" indent="0" rtl="0">
-              <a:spcBef>
-                <a:spcPts val="600"/>
-              </a:spcBef>
-              <a:spcAft>
-                <a:spcPts val="0"/>
-              </a:spcAft>
-              <a:buNone/>
-            </a:pPr>
-            <a:r>
-              <a:rPr sz="1300" b="1" i="0">
-                <a:solidFill>
-                  <a:srgbClr val="006E96"/>
-                </a:solidFill>
-                <a:latin typeface="Arial"/>
-              </a:rPr>
-              <a:t>KP1 · Government Enterprise Architecture · Module 5 · Video 5.2</a:t>
-            </a:r>
-          </a:p>
-          <a:p>
-            <a:r>
-              <a:rPr sz="1200" b="0" i="1">
-                <a:solidFill>
-                  <a:srgbClr val="595959"/>
-                </a:solidFill>
-                <a:latin typeface="Arial"/>
-              </a:rPr>
-              <a:t>The public record is consistent about what makes these programmes succeed and what kills them — and the killers are organisational, not technical. Knowing both lets you design your programme to last, and brief your minister on the real risks.</a:t>
-            </a:r>
-          </a:p>
-        </p:txBody>
-      </p:sp>
-      <p:sp>
-        <p:nvSpPr>
-          <p:cNvPr id="17" name="Title 9">
-            <a:extLst>
-              <a:ext uri="{FF2B5EF4-FFF2-40B4-BE49-F238E27FC236}">
-                <a16:creationId xmlns:a16="http://schemas.microsoft.com/office/drawing/2014/main" id="{5E8796F7-DD26-D250-5E97-B38B22298E72}"/>
-              </a:ext>
-            </a:extLst>
-          </p:cNvPr>
-          <p:cNvSpPr txBox="1">
-            <a:spLocks/>
-          </p:cNvSpPr>
-          <p:nvPr/>
-        </p:nvSpPr>
-        <p:spPr>
-          <a:xfrm>
-            <a:off x="284452" y="4363897"/>
-            <a:ext cx="6382893" cy="953213"/>
-          </a:xfrm>
-          <a:prstGeom prst="rect">
-            <a:avLst/>
-          </a:prstGeom>
-        </p:spPr>
-        <p:txBody>
-          <a:bodyPr anchor="t">
-            <a:noAutofit/>
-          </a:bodyPr>
-          <a:lstStyle>
-            <a:lvl1pPr algn="l" defTabSz="914400" rtl="0" eaLnBrk="1" latinLnBrk="0" hangingPunct="1">
-              <a:lnSpc>
-                <a:spcPct val="90000"/>
-              </a:lnSpc>
-              <a:spcBef>
-                <a:spcPct val="0"/>
-              </a:spcBef>
-              <a:buNone/>
-              <a:defRPr sz="4000" kern="1200">
-                <a:solidFill>
-                  <a:schemeClr val="bg1"/>
-                </a:solidFill>
-                <a:latin typeface="Arial" panose="020B0604020202020204" pitchFamily="34" charset="0"/>
-                <a:ea typeface="+mj-ea"/>
-                <a:cs typeface="Arial" panose="020B0604020202020204" pitchFamily="34" charset="0"/>
-              </a:defRPr>
-            </a:lvl1pPr>
-          </a:lstStyle>
-          <a:p>
-            <a:pPr marL="0" marR="0" lvl="0" indent="0" rtl="0">
-              <a:spcBef>
-                <a:spcPts val="600"/>
-              </a:spcBef>
-              <a:spcAft>
-                <a:spcPts val="1200"/>
-              </a:spcAft>
-              <a:buNone/>
-            </a:pPr>
-            <a:r>
-              <a:rPr sz="1400" b="1" i="0">
-                <a:solidFill>
-                  <a:srgbClr val="1A1A1A"/>
-                </a:solidFill>
-                <a:latin typeface="Arial"/>
-              </a:rPr>
-              <a:t>Length: </a:t>
-            </a:r>
-            <a:r>
-              <a:rPr sz="1400" b="0" i="0">
-                <a:solidFill>
-                  <a:srgbClr val="1A1A1A"/>
-                </a:solidFill>
-                <a:latin typeface="Arial"/>
-              </a:rPr>
-              <a:t>~3 mins</a:t>
-            </a:r>
-          </a:p>
-          <a:p>
-            <a:r>
-              <a:rPr sz="1400" b="1" i="0">
-                <a:solidFill>
-                  <a:srgbClr val="1A1A1A"/>
-                </a:solidFill>
-                <a:latin typeface="Arial"/>
-              </a:rPr>
-              <a:t>Target audience: </a:t>
-            </a:r>
-            <a:r>
-              <a:rPr sz="1400" b="0" i="0">
-                <a:solidFill>
-                  <a:srgbClr val="1A1A1A"/>
-                </a:solidFill>
-                <a:latin typeface="Arial"/>
-              </a:rPr>
-              <a:t>Director-general · head of a sectoral ICT unit · technical secretary</a:t>
-            </a:r>
-          </a:p>
-        </p:txBody>
-      </p:sp>
-      <p:sp>
-        <p:nvSpPr>
-          <p:cNvPr id="18" name="Rectangle 17"/>
-          <p:cNvSpPr/>
-          <p:nvPr/>
-        </p:nvSpPr>
-        <p:spPr>
-          <a:xfrm>
-            <a:off x="7022592" y="0"/>
-            <a:ext cx="5169103" cy="6858000"/>
-          </a:xfrm>
-          <a:prstGeom prst="rect">
-            <a:avLst/>
-          </a:prstGeom>
-          <a:solidFill>
-            <a:srgbClr val="009CD6"/>
-          </a:solidFill>
-          <a:ln>
-            <a:noFill/>
-          </a:ln>
-          <a:effectLst/>
-        </p:spPr>
-        <p:style>
-          <a:lnRef idx="1">
-            <a:schemeClr val="accent1"/>
-          </a:lnRef>
-          <a:fillRef idx="3">
-            <a:schemeClr val="accent1"/>
-          </a:fillRef>
-          <a:effectRef idx="2">
-            <a:schemeClr val="accent1"/>
-          </a:effectRef>
-          <a:fontRef idx="minor">
-            <a:schemeClr val="lt1"/>
-          </a:fontRef>
-        </p:style>
-        <p:txBody>
-          <a:bodyPr rtlCol="0" anchor="ctr"/>
-          <a:lstStyle/>
-          <a:p>
-            <a:pPr algn="ctr"/>
-          </a:p>
-        </p:txBody>
-      </p:sp>
-      <p:sp>
-        <p:nvSpPr>
-          <p:cNvPr id="19" name="TextBox 18"/>
-          <p:cNvSpPr txBox="1"/>
-          <p:nvPr/>
-        </p:nvSpPr>
-        <p:spPr>
-          <a:xfrm>
-            <a:off x="7452360" y="457200"/>
-            <a:ext cx="4297680" cy="457200"/>
-          </a:xfrm>
-          <a:prstGeom prst="rect">
-            <a:avLst/>
-          </a:prstGeom>
-          <a:noFill/>
-        </p:spPr>
-        <p:txBody>
-          <a:bodyPr wrap="square">
-            <a:spAutoFit/>
-          </a:bodyPr>
-          <a:lstStyle/>
-          <a:p>
-            <a:r>
-              <a:rPr sz="1100" b="1" i="0">
-                <a:solidFill>
-                  <a:srgbClr val="E5F5FB"/>
-                </a:solidFill>
-                <a:latin typeface="Arial"/>
-              </a:rPr>
-              <a:t>THE CASE YOU CARRY INTO THE ROOM</a:t>
-            </a:r>
-          </a:p>
-        </p:txBody>
-      </p:sp>
-      <p:sp>
-        <p:nvSpPr>
-          <p:cNvPr id="20" name="Rounded Rectangle 19"/>
-          <p:cNvSpPr/>
-          <p:nvPr/>
-        </p:nvSpPr>
-        <p:spPr>
-          <a:xfrm>
-            <a:off x="7452360" y="960120"/>
-            <a:ext cx="3840480" cy="658368"/>
-          </a:xfrm>
-          <a:prstGeom prst="roundRect">
-            <a:avLst>
-              <a:gd name="adj" fmla="val 14000"/>
-            </a:avLst>
-          </a:prstGeom>
-          <a:solidFill>
-            <a:srgbClr val="FFFFFF"/>
-          </a:solidFill>
-          <a:ln>
-            <a:noFill/>
-          </a:ln>
-          <a:effectLst/>
-        </p:spPr>
-        <p:style>
-          <a:lnRef idx="1">
-            <a:schemeClr val="accent1"/>
-          </a:lnRef>
-          <a:fillRef idx="3">
-            <a:schemeClr val="accent1"/>
-          </a:fillRef>
-          <a:effectRef idx="2">
-            <a:schemeClr val="accent1"/>
-          </a:effectRef>
-          <a:fontRef idx="minor">
-            <a:schemeClr val="lt1"/>
-          </a:fontRef>
-        </p:style>
-        <p:txBody>
-          <a:bodyPr rtlCol="0" anchor="ctr" lIns="164592" wrap="square"/>
-          <a:lstStyle/>
-          <a:p>
-            <a:pPr algn="ctr"/>
-            <a:r>
-              <a:rPr sz="1500" b="1" i="0">
-                <a:solidFill>
-                  <a:srgbClr val="1A1A1A"/>
-                </a:solidFill>
-                <a:latin typeface="Arial"/>
-              </a:rPr>
-              <a:t>Proven — four real governments</a:t>
-            </a:r>
-          </a:p>
-        </p:txBody>
-      </p:sp>
-      <p:sp>
-        <p:nvSpPr>
-          <p:cNvPr id="21" name="Rounded Rectangle 20"/>
-          <p:cNvSpPr/>
-          <p:nvPr/>
-        </p:nvSpPr>
-        <p:spPr>
-          <a:xfrm>
-            <a:off x="7452360" y="1892808"/>
-            <a:ext cx="3840480" cy="658368"/>
-          </a:xfrm>
-          <a:prstGeom prst="roundRect">
-            <a:avLst>
-              <a:gd name="adj" fmla="val 14000"/>
-            </a:avLst>
-          </a:prstGeom>
-          <a:solidFill>
-            <a:srgbClr val="FFFFFF"/>
-          </a:solidFill>
-          <a:ln>
-            <a:noFill/>
-          </a:ln>
-          <a:effectLst/>
-        </p:spPr>
-        <p:style>
-          <a:lnRef idx="1">
-            <a:schemeClr val="accent1"/>
-          </a:lnRef>
-          <a:fillRef idx="3">
-            <a:schemeClr val="accent1"/>
-          </a:fillRef>
-          <a:effectRef idx="2">
-            <a:schemeClr val="accent1"/>
-          </a:effectRef>
-          <a:fontRef idx="minor">
-            <a:schemeClr val="lt1"/>
-          </a:fontRef>
-        </p:style>
-        <p:txBody>
-          <a:bodyPr rtlCol="0" anchor="ctr" lIns="164592" wrap="square"/>
-          <a:lstStyle/>
-          <a:p>
-            <a:pPr algn="ctr"/>
-            <a:r>
-              <a:rPr sz="1500" b="1" i="0">
-                <a:solidFill>
-                  <a:srgbClr val="1A1A1A"/>
-                </a:solidFill>
-                <a:latin typeface="Arial"/>
-              </a:rPr>
-              <a:t>Portable — sector after sector</a:t>
-            </a:r>
-          </a:p>
-        </p:txBody>
-      </p:sp>
-      <p:sp>
-        <p:nvSpPr>
-          <p:cNvPr id="22" name="Rounded Rectangle 21"/>
-          <p:cNvSpPr/>
-          <p:nvPr/>
-        </p:nvSpPr>
-        <p:spPr>
-          <a:xfrm>
-            <a:off x="7452360" y="2825496"/>
-            <a:ext cx="3840480" cy="658368"/>
-          </a:xfrm>
-          <a:prstGeom prst="roundRect">
-            <a:avLst>
-              <a:gd name="adj" fmla="val 14000"/>
-            </a:avLst>
-          </a:prstGeom>
-          <a:solidFill>
-            <a:srgbClr val="FFFFFF"/>
-          </a:solidFill>
-          <a:ln>
-            <a:noFill/>
-          </a:ln>
-          <a:effectLst/>
-        </p:spPr>
-        <p:style>
-          <a:lnRef idx="1">
-            <a:schemeClr val="accent1"/>
-          </a:lnRef>
-          <a:fillRef idx="3">
-            <a:schemeClr val="accent1"/>
-          </a:fillRef>
-          <a:effectRef idx="2">
-            <a:schemeClr val="accent1"/>
-          </a:effectRef>
-          <a:fontRef idx="minor">
-            <a:schemeClr val="lt1"/>
-          </a:fontRef>
-        </p:style>
-        <p:txBody>
-          <a:bodyPr rtlCol="0" anchor="ctr" lIns="164592" wrap="square"/>
-          <a:lstStyle/>
-          <a:p>
-            <a:pPr algn="ctr"/>
-            <a:r>
-              <a:rPr sz="1500" b="1" i="0">
-                <a:solidFill>
-                  <a:srgbClr val="1A1A1A"/>
-                </a:solidFill>
-                <a:latin typeface="Arial"/>
-              </a:rPr>
-              <a:t>The commitment — the one page</a:t>
-            </a:r>
-          </a:p>
-        </p:txBody>
-      </p:sp>
-      <p:sp>
-        <p:nvSpPr>
-          <p:cNvPr id="23" name="Rounded Rectangle 22"/>
-          <p:cNvSpPr/>
-          <p:nvPr/>
-        </p:nvSpPr>
-        <p:spPr>
-          <a:xfrm>
-            <a:off x="7452360" y="3758184"/>
-            <a:ext cx="3840480" cy="658368"/>
-          </a:xfrm>
-          <a:prstGeom prst="roundRect">
-            <a:avLst>
-              <a:gd name="adj" fmla="val 14000"/>
-            </a:avLst>
-          </a:prstGeom>
-          <a:solidFill>
-            <a:srgbClr val="FFFFFF"/>
-          </a:solidFill>
-          <a:ln>
-            <a:noFill/>
-          </a:ln>
-          <a:effectLst/>
-        </p:spPr>
-        <p:style>
-          <a:lnRef idx="1">
-            <a:schemeClr val="accent1"/>
-          </a:lnRef>
-          <a:fillRef idx="3">
-            <a:schemeClr val="accent1"/>
-          </a:fillRef>
-          <a:effectRef idx="2">
-            <a:schemeClr val="accent1"/>
-          </a:effectRef>
-          <a:fontRef idx="minor">
-            <a:schemeClr val="lt1"/>
-          </a:fontRef>
-        </p:style>
-        <p:txBody>
-          <a:bodyPr rtlCol="0" anchor="ctr" lIns="164592" wrap="square"/>
-          <a:lstStyle/>
-          <a:p>
-            <a:pPr algn="ctr"/>
-            <a:r>
-              <a:rPr sz="1500" b="1" i="0">
-                <a:solidFill>
-                  <a:srgbClr val="1A1A1A"/>
-                </a:solidFill>
-                <a:latin typeface="Arial"/>
-              </a:rPr>
-              <a:t>The capability — your own people</a:t>
-            </a:r>
-          </a:p>
-        </p:txBody>
-      </p:sp>
-      <p:sp>
-        <p:nvSpPr>
-          <p:cNvPr id="24" name="Rounded Rectangle 23"/>
-          <p:cNvSpPr/>
-          <p:nvPr/>
-        </p:nvSpPr>
-        <p:spPr>
-          <a:xfrm>
-            <a:off x="7452360" y="4690872"/>
-            <a:ext cx="3840480" cy="658368"/>
-          </a:xfrm>
-          <a:prstGeom prst="roundRect">
-            <a:avLst>
-              <a:gd name="adj" fmla="val 14000"/>
-            </a:avLst>
-          </a:prstGeom>
-          <a:solidFill>
-            <a:srgbClr val="006E96"/>
-          </a:solidFill>
-          <a:ln>
-            <a:noFill/>
-          </a:ln>
-          <a:effectLst/>
-        </p:spPr>
-        <p:style>
-          <a:lnRef idx="1">
-            <a:schemeClr val="accent1"/>
-          </a:lnRef>
-          <a:fillRef idx="3">
-            <a:schemeClr val="accent1"/>
-          </a:fillRef>
-          <a:effectRef idx="2">
-            <a:schemeClr val="accent1"/>
-          </a:effectRef>
-          <a:fontRef idx="minor">
-            <a:schemeClr val="lt1"/>
-          </a:fontRef>
-        </p:style>
-        <p:txBody>
-          <a:bodyPr rtlCol="0" anchor="ctr" lIns="164592" wrap="square"/>
-          <a:lstStyle/>
-          <a:p>
-            <a:pPr algn="ctr"/>
-            <a:r>
-              <a:rPr sz="1500" b="1" i="0">
-                <a:solidFill>
-                  <a:srgbClr val="FFFFFF"/>
-                </a:solidFill>
-                <a:latin typeface="Arial"/>
-              </a:rPr>
-              <a:t>Necessary now, not just useful</a:t>
-            </a:r>
-          </a:p>
-        </p:txBody>
-      </p:sp>
-      <p:sp>
-        <p:nvSpPr>
-          <p:cNvPr id="25" name="TextBox 24"/>
-          <p:cNvSpPr txBox="1"/>
-          <p:nvPr/>
-        </p:nvSpPr>
-        <p:spPr>
-          <a:xfrm>
-            <a:off x="7452360" y="5806440"/>
-            <a:ext cx="4297680" cy="731520"/>
-          </a:xfrm>
-          <a:prstGeom prst="rect">
-            <a:avLst/>
-          </a:prstGeom>
-          <a:noFill/>
-        </p:spPr>
-        <p:txBody>
-          <a:bodyPr wrap="square">
-            <a:spAutoFit/>
-          </a:bodyPr>
-          <a:lstStyle/>
-          <a:p>
-            <a:r>
-              <a:rPr sz="1200" b="0" i="0">
-                <a:solidFill>
-                  <a:srgbClr val="FFFFFF"/>
-                </a:solidFill>
-                <a:latin typeface="Arial"/>
-              </a:rPr>
-              <a:t>4 governments · 4 killers to design out · 1 page for the minister</a:t>
-            </a:r>
-          </a:p>
-        </p:txBody>
-      </p:sp>
-    </p:spTree>
-    <p:extLst>
-      <p:ext uri="{BB962C8B-B14F-4D97-AF65-F5344CB8AC3E}">
-        <p14:creationId xmlns:p14="http://schemas.microsoft.com/office/powerpoint/2010/main" val="1196800265"/>
-      </p:ext>
-    </p:extLst>
-  </p:cSld>
-  <p:clrMapOvr>
-    <a:masterClrMapping/>
-  </p:clrMapOvr>
-</p:sld>
-</file>
-
-<file path=ppt/slides/slide10.xml><?xml version="1.0" encoding="utf-8"?>
-<p:sld xmlns:a="http://schemas.openxmlformats.org/drawingml/2006/main" xmlns:p="http://schemas.openxmlformats.org/presentationml/2006/main" xmlns:r="http://schemas.openxmlformats.org/officeDocument/2006/relationships">
-  <p:cSld>
-    <p:spTree>
-      <p:nvGrpSpPr>
-        <p:cNvPr id="1" name=""/>
-        <p:cNvGrpSpPr/>
-        <p:nvPr/>
-      </p:nvGrpSpPr>
-      <p:grpSpPr/>
-      <p:sp>
-        <p:nvSpPr>
-          <p:cNvPr id="2" name="TextBox 1"/>
-          <p:cNvSpPr txBox="1"/>
-          <p:nvPr/>
-        </p:nvSpPr>
-        <p:spPr>
-          <a:xfrm>
-            <a:off x="822960" y="822960"/>
-            <a:ext cx="7315200" cy="457200"/>
-          </a:xfrm>
-          <a:prstGeom prst="rect">
-            <a:avLst/>
-          </a:prstGeom>
-          <a:noFill/>
-        </p:spPr>
-        <p:txBody>
-          <a:bodyPr wrap="square">
-            <a:spAutoFit/>
-          </a:bodyPr>
-          <a:lstStyle/>
-          <a:p>
-            <a:r>
-              <a:rPr sz="1200" b="1" i="0">
-                <a:solidFill>
-                  <a:srgbClr val="595959"/>
-                </a:solidFill>
-                <a:latin typeface="Arial"/>
-              </a:rPr>
-              <a:t>KP1 · MODULE 5 · VIDEO 5.2</a:t>
-            </a:r>
-          </a:p>
-        </p:txBody>
-      </p:sp>
-      <p:sp>
-        <p:nvSpPr>
-          <p:cNvPr id="3" name="TextBox 2"/>
-          <p:cNvSpPr txBox="1"/>
-          <p:nvPr/>
-        </p:nvSpPr>
-        <p:spPr>
-          <a:xfrm>
-            <a:off x="822960" y="1828800"/>
-            <a:ext cx="2011680" cy="1097280"/>
-          </a:xfrm>
-          <a:prstGeom prst="rect">
-            <a:avLst/>
-          </a:prstGeom>
-          <a:noFill/>
-        </p:spPr>
-        <p:txBody>
-          <a:bodyPr wrap="square">
-            <a:spAutoFit/>
-          </a:bodyPr>
-          <a:lstStyle/>
-          <a:p>
-            <a:r>
-              <a:rPr sz="6000" b="1" i="0">
-                <a:solidFill>
-                  <a:srgbClr val="009CD6"/>
-                </a:solidFill>
-                <a:latin typeface="Arial"/>
-              </a:rPr>
-              <a:t>5.2</a:t>
-            </a:r>
-          </a:p>
-        </p:txBody>
-      </p:sp>
-      <p:sp>
-        <p:nvSpPr>
-          <p:cNvPr id="4" name="TextBox 3"/>
-          <p:cNvSpPr txBox="1"/>
-          <p:nvPr/>
-        </p:nvSpPr>
-        <p:spPr>
-          <a:xfrm>
-            <a:off x="822960" y="2880360"/>
-            <a:ext cx="9601200" cy="1371600"/>
-          </a:xfrm>
-          <a:prstGeom prst="rect">
-            <a:avLst/>
-          </a:prstGeom>
-          <a:noFill/>
-        </p:spPr>
-        <p:txBody>
-          <a:bodyPr wrap="square">
-            <a:spAutoFit/>
-          </a:bodyPr>
-          <a:lstStyle/>
-          <a:p>
-            <a:r>
-              <a:rPr sz="3400" b="1" i="0">
-                <a:solidFill>
-                  <a:srgbClr val="1A1A1A"/>
-                </a:solidFill>
-                <a:latin typeface="Arial"/>
-              </a:rPr>
-              <a:t>What the evidence says works — and what quietly kills these programmes</a:t>
-            </a:r>
-          </a:p>
-        </p:txBody>
-      </p:sp>
-      <p:sp>
-        <p:nvSpPr>
-          <p:cNvPr id="5" name="TextBox 4"/>
-          <p:cNvSpPr txBox="1"/>
-          <p:nvPr/>
-        </p:nvSpPr>
-        <p:spPr>
-          <a:xfrm>
-            <a:off x="822960" y="4343400"/>
-            <a:ext cx="9875520" cy="1554480"/>
-          </a:xfrm>
-          <a:prstGeom prst="rect">
-            <a:avLst/>
-          </a:prstGeom>
-          <a:noFill/>
-        </p:spPr>
-        <p:txBody>
-          <a:bodyPr wrap="square">
-            <a:spAutoFit/>
-          </a:bodyPr>
-          <a:lstStyle/>
-          <a:p>
-            <a:r>
-              <a:rPr sz="1700" b="0" i="1">
-                <a:solidFill>
-                  <a:srgbClr val="595959"/>
-                </a:solidFill>
-                <a:latin typeface="Arial"/>
-              </a:rPr>
-              <a:t>The public record is consistent about what makes these programmes succeed and what kills them — and the killers are organisational, not technical. Knowing both lets you design your programme to last, and brief your minister on the real risks.</a:t>
-            </a:r>
-          </a:p>
-        </p:txBody>
-      </p:sp>
-      <p:sp>
-        <p:nvSpPr>
-          <p:cNvPr id="6" name="TextBox 5"/>
-          <p:cNvSpPr txBox="1"/>
-          <p:nvPr/>
-        </p:nvSpPr>
-        <p:spPr>
-          <a:xfrm>
-            <a:off x="822960" y="5989320"/>
-            <a:ext cx="7315200" cy="365760"/>
-          </a:xfrm>
-          <a:prstGeom prst="rect">
-            <a:avLst/>
-          </a:prstGeom>
-          <a:noFill/>
-        </p:spPr>
-        <p:txBody>
-          <a:bodyPr wrap="square">
-            <a:spAutoFit/>
-          </a:bodyPr>
-          <a:lstStyle/>
-          <a:p>
-            <a:r>
-              <a:rPr sz="1200" b="0" i="0">
-                <a:solidFill>
-                  <a:srgbClr val="595959"/>
-                </a:solidFill>
-                <a:latin typeface="Arial"/>
-              </a:rPr>
-              <a:t>~3 minutes · standalone video · voice-over on text slides</a:t>
-            </a:r>
-          </a:p>
-        </p:txBody>
-      </p:sp>
-    </p:spTree>
-  </p:cSld>
-  <p:clrMapOvr>
-    <a:masterClrMapping/>
-  </p:clrMapOvr>
-</p:sld>
-</file>
-
 <file path=ppt/slides/slide11.xml><?xml version="1.0" encoding="utf-8"?>
 <p:sld xmlns:a="http://schemas.openxmlformats.org/drawingml/2006/main" xmlns:p="http://schemas.openxmlformats.org/presentationml/2006/main" xmlns:r="http://schemas.openxmlformats.org/officeDocument/2006/relationships">
   <p:cSld>
@@ -12475,58 +11555,14 @@
       <p:grpSpPr/>
       <p:sp>
         <p:nvSpPr>
-          <p:cNvPr id="2" name="Rectangle 1"/>
-          <p:cNvSpPr/>
-          <p:nvPr/>
-        </p:nvSpPr>
-        <p:spPr>
-          <a:xfrm>
-            <a:off x="457200" y="384048"/>
-            <a:ext cx="45720" cy="256032"/>
-          </a:xfrm>
-          <a:prstGeom prst="rect">
-            <a:avLst/>
-          </a:prstGeom>
-          <a:solidFill>
-            <a:srgbClr val="009CD6"/>
-          </a:solidFill>
-          <a:ln>
-            <a:noFill/>
-          </a:ln>
-          <a:effectLst/>
-        </p:spPr>
-        <p:style>
-          <a:lnRef idx="1">
-            <a:schemeClr val="accent1"/>
-          </a:lnRef>
-          <a:fillRef idx="3">
-            <a:schemeClr val="accent1"/>
-          </a:fillRef>
-          <a:effectRef idx="2">
-            <a:schemeClr val="accent1"/>
-          </a:effectRef>
-          <a:fontRef idx="minor">
-            <a:schemeClr val="lt1"/>
-          </a:fontRef>
-        </p:style>
-        <p:txBody>
-          <a:bodyPr rtlCol="0" anchor="ctr"/>
-          <a:lstStyle/>
-          <a:p>
-            <a:pPr algn="ctr"/>
-          </a:p>
-        </p:txBody>
-      </p:sp>
-      <p:sp>
-        <p:nvSpPr>
-          <p:cNvPr id="3" name="TextBox 2"/>
+          <p:cNvPr id="2" name="TextBox 1"/>
           <p:cNvSpPr txBox="1"/>
           <p:nvPr/>
         </p:nvSpPr>
         <p:spPr>
           <a:xfrm>
-            <a:off x="621792" y="274320"/>
-            <a:ext cx="11247120" cy="914400"/>
+            <a:off x="822960" y="822960"/>
+            <a:ext cx="7315200" cy="457200"/>
           </a:xfrm>
           <a:prstGeom prst="rect">
             <a:avLst/>
@@ -12540,66 +11576,81 @@
           <a:lstStyle/>
           <a:p>
             <a:r>
-              <a:rPr sz="2800" b="1" i="0">
+              <a:rPr sz="1200" b="1" i="0">
+                <a:solidFill>
+                  <a:srgbClr val="595959"/>
+                </a:solidFill>
+                <a:latin typeface="Arial"/>
+              </a:rPr>
+              <a:t>KP1 · MODULE 5 · VIDEO 5.2</a:t>
+            </a:r>
+          </a:p>
+        </p:txBody>
+      </p:sp>
+      <p:sp>
+        <p:nvSpPr>
+          <p:cNvPr id="3" name="TextBox 2"/>
+          <p:cNvSpPr txBox="1"/>
+          <p:nvPr/>
+        </p:nvSpPr>
+        <p:spPr>
+          <a:xfrm>
+            <a:off x="822960" y="1828800"/>
+            <a:ext cx="2011680" cy="1097280"/>
+          </a:xfrm>
+          <a:prstGeom prst="rect">
+            <a:avLst/>
+          </a:prstGeom>
+          <a:noFill/>
+        </p:spPr>
+        <p:txBody>
+          <a:bodyPr wrap="square">
+            <a:spAutoFit/>
+          </a:bodyPr>
+          <a:lstStyle/>
+          <a:p>
+            <a:r>
+              <a:rPr sz="6000" b="1" i="0">
+                <a:solidFill>
+                  <a:srgbClr val="009CD6"/>
+                </a:solidFill>
+                <a:latin typeface="Arial"/>
+              </a:rPr>
+              <a:t>5.2</a:t>
+            </a:r>
+          </a:p>
+        </p:txBody>
+      </p:sp>
+      <p:sp>
+        <p:nvSpPr>
+          <p:cNvPr id="4" name="TextBox 3"/>
+          <p:cNvSpPr txBox="1"/>
+          <p:nvPr/>
+        </p:nvSpPr>
+        <p:spPr>
+          <a:xfrm>
+            <a:off x="822960" y="2880360"/>
+            <a:ext cx="9601200" cy="1371600"/>
+          </a:xfrm>
+          <a:prstGeom prst="rect">
+            <a:avLst/>
+          </a:prstGeom>
+          <a:noFill/>
+        </p:spPr>
+        <p:txBody>
+          <a:bodyPr wrap="square">
+            <a:spAutoFit/>
+          </a:bodyPr>
+          <a:lstStyle/>
+          <a:p>
+            <a:r>
+              <a:rPr sz="3400" b="1" i="0">
                 <a:solidFill>
                   <a:srgbClr val="1A1A1A"/>
                 </a:solidFill>
                 <a:latin typeface="Arial"/>
               </a:rPr>
-              <a:t>Four things quietly kill them — usually in the second year</a:t>
-            </a:r>
-          </a:p>
-        </p:txBody>
-      </p:sp>
-      <p:sp>
-        <p:nvSpPr>
-          <p:cNvPr id="4" name="Oval 3"/>
-          <p:cNvSpPr/>
-          <p:nvPr/>
-        </p:nvSpPr>
-        <p:spPr>
-          <a:xfrm>
-            <a:off x="621792" y="1508760"/>
-            <a:ext cx="310896" cy="310896"/>
-          </a:xfrm>
-          <a:prstGeom prst="ellipse">
-            <a:avLst/>
-          </a:prstGeom>
-          <a:solidFill>
-            <a:srgbClr val="009CD6"/>
-          </a:solidFill>
-          <a:ln>
-            <a:noFill/>
-          </a:ln>
-          <a:effectLst/>
-        </p:spPr>
-        <p:style>
-          <a:lnRef idx="1">
-            <a:schemeClr val="accent1"/>
-          </a:lnRef>
-          <a:fillRef idx="3">
-            <a:schemeClr val="accent1"/>
-          </a:fillRef>
-          <a:effectRef idx="2">
-            <a:schemeClr val="accent1"/>
-          </a:effectRef>
-          <a:fontRef idx="minor">
-            <a:schemeClr val="lt1"/>
-          </a:fontRef>
-        </p:style>
-        <p:txBody>
-          <a:bodyPr rtlCol="0" anchor="ctr" lIns="0" rIns="0" tIns="0" bIns="0" wrap="square"/>
-          <a:lstStyle/>
-          <a:p>
-            <a:pPr algn="ctr"/>
-            <a:r>
-              <a:rPr sz="1300" b="1" i="0">
-                <a:solidFill>
-                  <a:srgbClr val="FFFFFF"/>
-                </a:solidFill>
-                <a:latin typeface="Arial"/>
-              </a:rPr>
-              <a:t>1</a:t>
+              <a:t>What the evidence says works — and what quietly kills these programmes</a:t>
             </a:r>
           </a:p>
         </p:txBody>
@@ -12612,8 +11663,8 @@
         </p:nvSpPr>
         <p:spPr>
           <a:xfrm>
-            <a:off x="1115568" y="1463040"/>
-            <a:ext cx="10527487" cy="1028699"/>
+            <a:off x="822960" y="4343400"/>
+            <a:ext cx="9875520" cy="1554480"/>
           </a:xfrm>
           <a:prstGeom prst="rect">
             <a:avLst/>
@@ -12626,146 +11677,28 @@
           </a:bodyPr>
           <a:lstStyle/>
           <a:p>
-            <a:pPr>
-              <a:spcAft>
-                <a:spcPts val="300"/>
-              </a:spcAft>
-            </a:pPr>
-            <a:r>
-              <a:rPr sz="1900" b="1" i="0">
-                <a:solidFill>
-                  <a:srgbClr val="1A1A1A"/>
-                </a:solidFill>
-                <a:latin typeface="Arial"/>
-              </a:rPr>
-              <a:t>The team is pulled onto the urgent flagship</a:t>
-            </a:r>
-          </a:p>
-          <a:p>
-            <a:pPr>
-              <a:spcAft>
-                <a:spcPts val="300"/>
-              </a:spcAft>
-            </a:pPr>
-            <a:r>
-              <a:rPr sz="1550" b="0" i="0">
+            <a:r>
+              <a:rPr sz="1700" b="0" i="1">
                 <a:solidFill>
                   <a:srgbClr val="595959"/>
                 </a:solidFill>
                 <a:latin typeface="Arial"/>
               </a:rPr>
-              <a:t>The architecture work simply stops.</a:t>
+              <a:t>The public record is consistent about what makes these programmes succeed and what kills them — and the killers are organisational, not technical. Knowing both lets you design your programme to last, and brief your minister on the real risks.</a:t>
             </a:r>
           </a:p>
         </p:txBody>
       </p:sp>
       <p:sp>
         <p:nvSpPr>
-          <p:cNvPr id="6" name="Rectangle 5"/>
-          <p:cNvSpPr/>
-          <p:nvPr/>
-        </p:nvSpPr>
-        <p:spPr>
-          <a:xfrm>
-            <a:off x="621792" y="2496312"/>
-            <a:ext cx="10881360" cy="12700"/>
-          </a:xfrm>
-          <a:prstGeom prst="rect">
-            <a:avLst/>
-          </a:prstGeom>
-          <a:solidFill>
-            <a:srgbClr val="DDECF4"/>
-          </a:solidFill>
-          <a:ln>
-            <a:noFill/>
-          </a:ln>
-          <a:effectLst/>
-        </p:spPr>
-        <p:style>
-          <a:lnRef idx="1">
-            <a:schemeClr val="accent1"/>
-          </a:lnRef>
-          <a:fillRef idx="3">
-            <a:schemeClr val="accent1"/>
-          </a:fillRef>
-          <a:effectRef idx="2">
-            <a:schemeClr val="accent1"/>
-          </a:effectRef>
-          <a:fontRef idx="minor">
-            <a:schemeClr val="lt1"/>
-          </a:fontRef>
-        </p:style>
-        <p:txBody>
-          <a:bodyPr rtlCol="0" anchor="ctr"/>
-          <a:lstStyle/>
-          <a:p>
-            <a:pPr algn="ctr"/>
-          </a:p>
-        </p:txBody>
-      </p:sp>
-      <p:sp>
-        <p:nvSpPr>
-          <p:cNvPr id="7" name="Oval 6"/>
-          <p:cNvSpPr/>
-          <p:nvPr/>
-        </p:nvSpPr>
-        <p:spPr>
-          <a:xfrm>
-            <a:off x="621792" y="2583179"/>
-            <a:ext cx="310896" cy="310896"/>
-          </a:xfrm>
-          <a:prstGeom prst="ellipse">
-            <a:avLst/>
-          </a:prstGeom>
-          <a:solidFill>
-            <a:srgbClr val="009CD6"/>
-          </a:solidFill>
-          <a:ln>
-            <a:noFill/>
-          </a:ln>
-          <a:effectLst/>
-        </p:spPr>
-        <p:style>
-          <a:lnRef idx="1">
-            <a:schemeClr val="accent1"/>
-          </a:lnRef>
-          <a:fillRef idx="3">
-            <a:schemeClr val="accent1"/>
-          </a:fillRef>
-          <a:effectRef idx="2">
-            <a:schemeClr val="accent1"/>
-          </a:effectRef>
-          <a:fontRef idx="minor">
-            <a:schemeClr val="lt1"/>
-          </a:fontRef>
-        </p:style>
-        <p:txBody>
-          <a:bodyPr rtlCol="0" anchor="ctr" lIns="0" rIns="0" tIns="0" bIns="0" wrap="square"/>
-          <a:lstStyle/>
-          <a:p>
-            <a:pPr algn="ctr"/>
-            <a:r>
-              <a:rPr sz="1300" b="1" i="0">
-                <a:solidFill>
-                  <a:srgbClr val="FFFFFF"/>
-                </a:solidFill>
-                <a:latin typeface="Arial"/>
-              </a:rPr>
-              <a:t>2</a:t>
-            </a:r>
-          </a:p>
-        </p:txBody>
-      </p:sp>
-      <p:sp>
-        <p:nvSpPr>
-          <p:cNvPr id="8" name="TextBox 7"/>
+          <p:cNvPr id="6" name="TextBox 5"/>
           <p:cNvSpPr txBox="1"/>
           <p:nvPr/>
         </p:nvSpPr>
         <p:spPr>
           <a:xfrm>
-            <a:off x="1115568" y="2537460"/>
-            <a:ext cx="10527487" cy="1028699"/>
+            <a:off x="822960" y="5989320"/>
+            <a:ext cx="7315200" cy="365760"/>
           </a:xfrm>
           <a:prstGeom prst="rect">
             <a:avLst/>
@@ -12778,407 +11711,14 @@
           </a:bodyPr>
           <a:lstStyle/>
           <a:p>
-            <a:pPr>
-              <a:spcAft>
-                <a:spcPts val="300"/>
-              </a:spcAft>
-            </a:pPr>
-            <a:r>
-              <a:rPr sz="1900" b="1" i="0">
-                <a:solidFill>
-                  <a:srgbClr val="1A1A1A"/>
-                </a:solidFill>
-                <a:latin typeface="Arial"/>
-              </a:rPr>
-              <a:t>The sponsor changes</a:t>
-            </a:r>
-          </a:p>
-          <a:p>
-            <a:pPr>
-              <a:spcAft>
-                <a:spcPts val="300"/>
-              </a:spcAft>
-            </a:pPr>
-            <a:r>
-              <a:rPr sz="1550" b="0" i="0">
+            <a:r>
+              <a:rPr sz="1200" b="0" i="0">
                 <a:solidFill>
                   <a:srgbClr val="595959"/>
                 </a:solidFill>
                 <a:latin typeface="Arial"/>
               </a:rPr>
-              <a:t>The successor has their own priorities.</a:t>
-            </a:r>
-          </a:p>
-        </p:txBody>
-      </p:sp>
-      <p:sp>
-        <p:nvSpPr>
-          <p:cNvPr id="9" name="Rectangle 8"/>
-          <p:cNvSpPr/>
-          <p:nvPr/>
-        </p:nvSpPr>
-        <p:spPr>
-          <a:xfrm>
-            <a:off x="621792" y="3570732"/>
-            <a:ext cx="10881360" cy="12700"/>
-          </a:xfrm>
-          <a:prstGeom prst="rect">
-            <a:avLst/>
-          </a:prstGeom>
-          <a:solidFill>
-            <a:srgbClr val="DDECF4"/>
-          </a:solidFill>
-          <a:ln>
-            <a:noFill/>
-          </a:ln>
-          <a:effectLst/>
-        </p:spPr>
-        <p:style>
-          <a:lnRef idx="1">
-            <a:schemeClr val="accent1"/>
-          </a:lnRef>
-          <a:fillRef idx="3">
-            <a:schemeClr val="accent1"/>
-          </a:fillRef>
-          <a:effectRef idx="2">
-            <a:schemeClr val="accent1"/>
-          </a:effectRef>
-          <a:fontRef idx="minor">
-            <a:schemeClr val="lt1"/>
-          </a:fontRef>
-        </p:style>
-        <p:txBody>
-          <a:bodyPr rtlCol="0" anchor="ctr"/>
-          <a:lstStyle/>
-          <a:p>
-            <a:pPr algn="ctr"/>
-          </a:p>
-        </p:txBody>
-      </p:sp>
-      <p:sp>
-        <p:nvSpPr>
-          <p:cNvPr id="10" name="Oval 9"/>
-          <p:cNvSpPr/>
-          <p:nvPr/>
-        </p:nvSpPr>
-        <p:spPr>
-          <a:xfrm>
-            <a:off x="621792" y="3657599"/>
-            <a:ext cx="310896" cy="310896"/>
-          </a:xfrm>
-          <a:prstGeom prst="ellipse">
-            <a:avLst/>
-          </a:prstGeom>
-          <a:solidFill>
-            <a:srgbClr val="009CD6"/>
-          </a:solidFill>
-          <a:ln>
-            <a:noFill/>
-          </a:ln>
-          <a:effectLst/>
-        </p:spPr>
-        <p:style>
-          <a:lnRef idx="1">
-            <a:schemeClr val="accent1"/>
-          </a:lnRef>
-          <a:fillRef idx="3">
-            <a:schemeClr val="accent1"/>
-          </a:fillRef>
-          <a:effectRef idx="2">
-            <a:schemeClr val="accent1"/>
-          </a:effectRef>
-          <a:fontRef idx="minor">
-            <a:schemeClr val="lt1"/>
-          </a:fontRef>
-        </p:style>
-        <p:txBody>
-          <a:bodyPr rtlCol="0" anchor="ctr" lIns="0" rIns="0" tIns="0" bIns="0" wrap="square"/>
-          <a:lstStyle/>
-          <a:p>
-            <a:pPr algn="ctr"/>
-            <a:r>
-              <a:rPr sz="1300" b="1" i="0">
-                <a:solidFill>
-                  <a:srgbClr val="FFFFFF"/>
-                </a:solidFill>
-                <a:latin typeface="Arial"/>
-              </a:rPr>
-              <a:t>3</a:t>
-            </a:r>
-          </a:p>
-        </p:txBody>
-      </p:sp>
-      <p:sp>
-        <p:nvSpPr>
-          <p:cNvPr id="11" name="TextBox 10"/>
-          <p:cNvSpPr txBox="1"/>
-          <p:nvPr/>
-        </p:nvSpPr>
-        <p:spPr>
-          <a:xfrm>
-            <a:off x="1115568" y="3611879"/>
-            <a:ext cx="10527487" cy="1028699"/>
-          </a:xfrm>
-          <a:prstGeom prst="rect">
-            <a:avLst/>
-          </a:prstGeom>
-          <a:noFill/>
-        </p:spPr>
-        <p:txBody>
-          <a:bodyPr wrap="square">
-            <a:spAutoFit/>
-          </a:bodyPr>
-          <a:lstStyle/>
-          <a:p>
-            <a:pPr>
-              <a:spcAft>
-                <a:spcPts val="300"/>
-              </a:spcAft>
-            </a:pPr>
-            <a:r>
-              <a:rPr sz="1900" b="1" i="0">
-                <a:solidFill>
-                  <a:srgbClr val="1A1A1A"/>
-                </a:solidFill>
-                <a:latin typeface="Arial"/>
-              </a:rPr>
-              <a:t>Governance drifts to advisory under delivery pressure</a:t>
-            </a:r>
-          </a:p>
-          <a:p>
-            <a:pPr>
-              <a:spcAft>
-                <a:spcPts val="300"/>
-              </a:spcAft>
-            </a:pPr>
-            <a:r>
-              <a:rPr sz="1550" b="0" i="0">
-                <a:solidFill>
-                  <a:srgbClr val="595959"/>
-                </a:solidFill>
-                <a:latin typeface="Arial"/>
-              </a:rPr>
-              <a:t>One powerful project through, then another, until its "no" means nothing.</a:t>
-            </a:r>
-          </a:p>
-        </p:txBody>
-      </p:sp>
-      <p:sp>
-        <p:nvSpPr>
-          <p:cNvPr id="12" name="Rectangle 11"/>
-          <p:cNvSpPr/>
-          <p:nvPr/>
-        </p:nvSpPr>
-        <p:spPr>
-          <a:xfrm>
-            <a:off x="621792" y="4645152"/>
-            <a:ext cx="10881360" cy="12700"/>
-          </a:xfrm>
-          <a:prstGeom prst="rect">
-            <a:avLst/>
-          </a:prstGeom>
-          <a:solidFill>
-            <a:srgbClr val="DDECF4"/>
-          </a:solidFill>
-          <a:ln>
-            <a:noFill/>
-          </a:ln>
-          <a:effectLst/>
-        </p:spPr>
-        <p:style>
-          <a:lnRef idx="1">
-            <a:schemeClr val="accent1"/>
-          </a:lnRef>
-          <a:fillRef idx="3">
-            <a:schemeClr val="accent1"/>
-          </a:fillRef>
-          <a:effectRef idx="2">
-            <a:schemeClr val="accent1"/>
-          </a:effectRef>
-          <a:fontRef idx="minor">
-            <a:schemeClr val="lt1"/>
-          </a:fontRef>
-        </p:style>
-        <p:txBody>
-          <a:bodyPr rtlCol="0" anchor="ctr"/>
-          <a:lstStyle/>
-          <a:p>
-            <a:pPr algn="ctr"/>
-          </a:p>
-        </p:txBody>
-      </p:sp>
-      <p:sp>
-        <p:nvSpPr>
-          <p:cNvPr id="13" name="Oval 12"/>
-          <p:cNvSpPr/>
-          <p:nvPr/>
-        </p:nvSpPr>
-        <p:spPr>
-          <a:xfrm>
-            <a:off x="621792" y="4732020"/>
-            <a:ext cx="310896" cy="310896"/>
-          </a:xfrm>
-          <a:prstGeom prst="ellipse">
-            <a:avLst/>
-          </a:prstGeom>
-          <a:solidFill>
-            <a:srgbClr val="009CD6"/>
-          </a:solidFill>
-          <a:ln>
-            <a:noFill/>
-          </a:ln>
-          <a:effectLst/>
-        </p:spPr>
-        <p:style>
-          <a:lnRef idx="1">
-            <a:schemeClr val="accent1"/>
-          </a:lnRef>
-          <a:fillRef idx="3">
-            <a:schemeClr val="accent1"/>
-          </a:fillRef>
-          <a:effectRef idx="2">
-            <a:schemeClr val="accent1"/>
-          </a:effectRef>
-          <a:fontRef idx="minor">
-            <a:schemeClr val="lt1"/>
-          </a:fontRef>
-        </p:style>
-        <p:txBody>
-          <a:bodyPr rtlCol="0" anchor="ctr" lIns="0" rIns="0" tIns="0" bIns="0" wrap="square"/>
-          <a:lstStyle/>
-          <a:p>
-            <a:pPr algn="ctr"/>
-            <a:r>
-              <a:rPr sz="1300" b="1" i="0">
-                <a:solidFill>
-                  <a:srgbClr val="FFFFFF"/>
-                </a:solidFill>
-                <a:latin typeface="Arial"/>
-              </a:rPr>
-              <a:t>4</a:t>
-            </a:r>
-          </a:p>
-        </p:txBody>
-      </p:sp>
-      <p:sp>
-        <p:nvSpPr>
-          <p:cNvPr id="14" name="TextBox 13"/>
-          <p:cNvSpPr txBox="1"/>
-          <p:nvPr/>
-        </p:nvSpPr>
-        <p:spPr>
-          <a:xfrm>
-            <a:off x="1115568" y="4686300"/>
-            <a:ext cx="10527487" cy="1028699"/>
-          </a:xfrm>
-          <a:prstGeom prst="rect">
-            <a:avLst/>
-          </a:prstGeom>
-          <a:noFill/>
-        </p:spPr>
-        <p:txBody>
-          <a:bodyPr wrap="square">
-            <a:spAutoFit/>
-          </a:bodyPr>
-          <a:lstStyle/>
-          <a:p>
-            <a:pPr>
-              <a:spcAft>
-                <a:spcPts val="300"/>
-              </a:spcAft>
-            </a:pPr>
-            <a:r>
-              <a:rPr sz="1900" b="1" i="0">
-                <a:solidFill>
-                  <a:srgbClr val="1A1A1A"/>
-                </a:solidFill>
-                <a:latin typeface="Arial"/>
-              </a:rPr>
-              <a:t>Funding becomes an annual favour</a:t>
-            </a:r>
-          </a:p>
-          <a:p>
-            <a:pPr>
-              <a:spcAft>
-                <a:spcPts val="300"/>
-              </a:spcAft>
-            </a:pPr>
-            <a:r>
-              <a:rPr sz="1550" b="0" i="0">
-                <a:solidFill>
-                  <a:srgbClr val="595959"/>
-                </a:solidFill>
-                <a:latin typeface="Arial"/>
-              </a:rPr>
-              <a:t>One budget cycle removes it.</a:t>
-            </a:r>
-          </a:p>
-        </p:txBody>
-      </p:sp>
-      <p:sp>
-        <p:nvSpPr>
-          <p:cNvPr id="15" name="TextBox 14"/>
-          <p:cNvSpPr txBox="1"/>
-          <p:nvPr/>
-        </p:nvSpPr>
-        <p:spPr>
-          <a:xfrm>
-            <a:off x="658368" y="5870448"/>
-            <a:ext cx="10881360" cy="548640"/>
-          </a:xfrm>
-          <a:prstGeom prst="rect">
-            <a:avLst/>
-          </a:prstGeom>
-          <a:noFill/>
-        </p:spPr>
-        <p:txBody>
-          <a:bodyPr wrap="square">
-            <a:spAutoFit/>
-          </a:bodyPr>
-          <a:lstStyle/>
-          <a:p>
-            <a:r>
-              <a:rPr sz="1550" b="1" i="0">
-                <a:solidFill>
-                  <a:srgbClr val="006E96"/>
-                </a:solidFill>
-                <a:latin typeface="Arial"/>
-              </a:rPr>
-              <a:t>None of them is dramatic. Each one is a slow fade.</a:t>
-            </a:r>
-          </a:p>
-        </p:txBody>
-      </p:sp>
-      <p:sp>
-        <p:nvSpPr>
-          <p:cNvPr id="16" name="TextBox 15"/>
-          <p:cNvSpPr txBox="1"/>
-          <p:nvPr/>
-        </p:nvSpPr>
-        <p:spPr>
-          <a:xfrm>
-            <a:off x="457200" y="6473952"/>
-            <a:ext cx="7772400" cy="292608"/>
-          </a:xfrm>
-          <a:prstGeom prst="rect">
-            <a:avLst/>
-          </a:prstGeom>
-          <a:noFill/>
-        </p:spPr>
-        <p:txBody>
-          <a:bodyPr wrap="square">
-            <a:spAutoFit/>
-          </a:bodyPr>
-          <a:lstStyle/>
-          <a:p>
-            <a:r>
-              <a:rPr sz="900" b="0" i="0">
-                <a:solidFill>
-                  <a:srgbClr val="595959"/>
-                </a:solidFill>
-                <a:latin typeface="Arial"/>
-              </a:rPr>
-              <a:t>5.2 · What the evidence says works — and what quietly kills these programmes</a:t>
+              <a:t>~3 minutes · standalone video · voice-over on text slides</a:t>
             </a:r>
           </a:p>
         </p:txBody>
@@ -13203,58 +11743,14 @@
       <p:grpSpPr/>
       <p:sp>
         <p:nvSpPr>
-          <p:cNvPr id="2" name="Rectangle 1"/>
-          <p:cNvSpPr/>
-          <p:nvPr/>
-        </p:nvSpPr>
-        <p:spPr>
-          <a:xfrm>
-            <a:off x="457200" y="384048"/>
-            <a:ext cx="45720" cy="256032"/>
-          </a:xfrm>
-          <a:prstGeom prst="rect">
-            <a:avLst/>
-          </a:prstGeom>
-          <a:solidFill>
-            <a:srgbClr val="009CD6"/>
-          </a:solidFill>
-          <a:ln>
-            <a:noFill/>
-          </a:ln>
-          <a:effectLst/>
-        </p:spPr>
-        <p:style>
-          <a:lnRef idx="1">
-            <a:schemeClr val="accent1"/>
-          </a:lnRef>
-          <a:fillRef idx="3">
-            <a:schemeClr val="accent1"/>
-          </a:fillRef>
-          <a:effectRef idx="2">
-            <a:schemeClr val="accent1"/>
-          </a:effectRef>
-          <a:fontRef idx="minor">
-            <a:schemeClr val="lt1"/>
-          </a:fontRef>
-        </p:style>
-        <p:txBody>
-          <a:bodyPr rtlCol="0" anchor="ctr"/>
-          <a:lstStyle/>
-          <a:p>
-            <a:pPr algn="ctr"/>
-          </a:p>
-        </p:txBody>
-      </p:sp>
-      <p:sp>
-        <p:nvSpPr>
-          <p:cNvPr id="3" name="TextBox 2"/>
+          <p:cNvPr id="2" name="TextBox 1"/>
           <p:cNvSpPr txBox="1"/>
           <p:nvPr/>
         </p:nvSpPr>
         <p:spPr>
           <a:xfrm>
-            <a:off x="621792" y="274320"/>
-            <a:ext cx="11247120" cy="914400"/>
+            <a:off x="1005840" y="1325880"/>
+            <a:ext cx="5486400" cy="365760"/>
           </a:xfrm>
           <a:prstGeom prst="rect">
             <a:avLst/>
@@ -13268,13 +11764,47 @@
           <a:lstStyle/>
           <a:p>
             <a:r>
-              <a:rPr sz="2800" b="1" i="0">
+              <a:rPr sz="1200" b="1" i="0">
+                <a:solidFill>
+                  <a:srgbClr val="006E96"/>
+                </a:solidFill>
+                <a:latin typeface="Arial"/>
+              </a:rPr>
+              <a:t>WHERE WE START</a:t>
+            </a:r>
+          </a:p>
+        </p:txBody>
+      </p:sp>
+      <p:sp>
+        <p:nvSpPr>
+          <p:cNvPr id="3" name="TextBox 2"/>
+          <p:cNvSpPr txBox="1"/>
+          <p:nvPr/>
+        </p:nvSpPr>
+        <p:spPr>
+          <a:xfrm>
+            <a:off x="1005840" y="1783080"/>
+            <a:ext cx="10149840" cy="1737360"/>
+          </a:xfrm>
+          <a:prstGeom prst="rect">
+            <a:avLst/>
+          </a:prstGeom>
+          <a:noFill/>
+        </p:spPr>
+        <p:txBody>
+          <a:bodyPr wrap="square">
+            <a:spAutoFit/>
+          </a:bodyPr>
+          <a:lstStyle/>
+          <a:p>
+            <a:r>
+              <a:rPr sz="3000" b="1" i="0">
                 <a:solidFill>
                   <a:srgbClr val="1A1A1A"/>
                 </a:solidFill>
                 <a:latin typeface="Arial"/>
               </a:rPr>
-              <a:t>Not one of the killers is about technology</a:t>
+              <a:t>What works is known. The killers are the harder half.</a:t>
             </a:r>
           </a:p>
         </p:txBody>
@@ -13287,8 +11817,8 @@
         </p:nvSpPr>
         <p:spPr>
           <a:xfrm>
-            <a:off x="658368" y="1600200"/>
-            <a:ext cx="10881360" cy="2194560"/>
+            <a:off x="1005840" y="3611880"/>
+            <a:ext cx="10149840" cy="2377440"/>
           </a:xfrm>
           <a:prstGeom prst="rect">
             <a:avLst/>
@@ -13303,125 +11833,40 @@
           <a:p>
             <a:pPr>
               <a:spcAft>
-                <a:spcPts val="1200"/>
+                <a:spcPts val="800"/>
               </a:spcAft>
             </a:pPr>
             <a:r>
-              <a:rPr sz="2000" b="0" i="0">
+              <a:rPr sz="1700" b="0" i="0">
                 <a:solidFill>
-                  <a:srgbClr val="1A1A1A"/>
+                  <a:srgbClr val="595959"/>
                 </a:solidFill>
                 <a:latin typeface="Arial"/>
               </a:rPr>
-              <a:t>They are about people, authority and money — protecting the team, securing the mandate, defending the governance, locking in the funding.</a:t>
+              <a:t>A protected team. A framework agencies adopt. Governance that can say no. Funding sustained for years.</a:t>
             </a:r>
           </a:p>
           <a:p>
             <a:pPr>
               <a:spcAft>
-                <a:spcPts val="1200"/>
+                <a:spcPts val="800"/>
               </a:spcAft>
             </a:pPr>
             <a:r>
-              <a:rPr sz="2000" b="0" i="0">
+              <a:rPr sz="1700" b="0" i="0">
                 <a:solidFill>
-                  <a:srgbClr val="1A1A1A"/>
+                  <a:srgbClr val="595959"/>
                 </a:solidFill>
                 <a:latin typeface="Arial"/>
               </a:rPr>
-              <a:t>Which is the good news, because those are what you can influence. The chief architect cannot protect their own team or secure their own five-year budget. Only the strategist who commissioned the work can.</a:t>
+              <a:t>The failures are almost never technical.</a:t>
             </a:r>
           </a:p>
         </p:txBody>
       </p:sp>
       <p:sp>
         <p:nvSpPr>
-          <p:cNvPr id="5" name="Rounded Rectangle 4"/>
-          <p:cNvSpPr/>
-          <p:nvPr/>
-        </p:nvSpPr>
-        <p:spPr>
-          <a:xfrm>
-            <a:off x="658368" y="3977639"/>
-            <a:ext cx="10881360" cy="1325880"/>
-          </a:xfrm>
-          <a:prstGeom prst="roundRect">
-            <a:avLst>
-              <a:gd name="adj" fmla="val 4500"/>
-            </a:avLst>
-          </a:prstGeom>
-          <a:solidFill>
-            <a:srgbClr val="E5F5FB"/>
-          </a:solidFill>
-          <a:ln>
-            <a:noFill/>
-          </a:ln>
-          <a:effectLst/>
-        </p:spPr>
-        <p:style>
-          <a:lnRef idx="1">
-            <a:schemeClr val="accent1"/>
-          </a:lnRef>
-          <a:fillRef idx="3">
-            <a:schemeClr val="accent1"/>
-          </a:fillRef>
-          <a:effectRef idx="2">
-            <a:schemeClr val="accent1"/>
-          </a:effectRef>
-          <a:fontRef idx="minor">
-            <a:schemeClr val="lt1"/>
-          </a:fontRef>
-        </p:style>
-        <p:txBody>
-          <a:bodyPr rtlCol="0" anchor="ctr"/>
-          <a:lstStyle/>
-          <a:p>
-            <a:pPr algn="ctr"/>
-          </a:p>
-        </p:txBody>
-      </p:sp>
-      <p:sp>
-        <p:nvSpPr>
-          <p:cNvPr id="6" name="TextBox 5"/>
-          <p:cNvSpPr txBox="1"/>
-          <p:nvPr/>
-        </p:nvSpPr>
-        <p:spPr>
-          <a:xfrm>
-            <a:off x="859536" y="4169663"/>
-            <a:ext cx="10479024" cy="1051560"/>
-          </a:xfrm>
-          <a:prstGeom prst="rect">
-            <a:avLst/>
-          </a:prstGeom>
-          <a:noFill/>
-        </p:spPr>
-        <p:txBody>
-          <a:bodyPr wrap="square">
-            <a:spAutoFit/>
-          </a:bodyPr>
-          <a:lstStyle/>
-          <a:p>
-            <a:pPr>
-              <a:spcAft>
-                <a:spcPts val="700"/>
-              </a:spcAft>
-            </a:pPr>
-            <a:r>
-              <a:rPr sz="2300" b="1" i="0">
-                <a:solidFill>
-                  <a:srgbClr val="006E96"/>
-                </a:solidFill>
-                <a:latin typeface="Arial"/>
-              </a:rPr>
-              <a:t>The failures are organisational, which means they are yours to prevent.</a:t>
-            </a:r>
-          </a:p>
-        </p:txBody>
-      </p:sp>
-      <p:sp>
-        <p:nvSpPr>
-          <p:cNvPr id="7" name="TextBox 6"/>
+          <p:cNvPr id="5" name="TextBox 4"/>
           <p:cNvSpPr txBox="1"/>
           <p:nvPr/>
         </p:nvSpPr>
@@ -13449,6 +11894,41 @@
                 <a:latin typeface="Arial"/>
               </a:rPr>
               <a:t>5.2 · What the evidence says works — and what quietly kills these programmes</a:t>
+            </a:r>
+          </a:p>
+        </p:txBody>
+      </p:sp>
+      <p:sp>
+        <p:nvSpPr>
+          <p:cNvPr id="6" name="TextBox 5"/>
+          <p:cNvSpPr txBox="1"/>
+          <p:nvPr/>
+        </p:nvSpPr>
+        <p:spPr>
+          <a:xfrm>
+            <a:off x="10058400" y="6473952"/>
+            <a:ext cx="1673352" cy="292608"/>
+          </a:xfrm>
+          <a:prstGeom prst="rect">
+            <a:avLst/>
+          </a:prstGeom>
+          <a:noFill/>
+        </p:spPr>
+        <p:txBody>
+          <a:bodyPr wrap="square">
+            <a:spAutoFit/>
+          </a:bodyPr>
+          <a:lstStyle/>
+          <a:p>
+            <a:pPr algn="r"/>
+            <a:r>
+              <a:rPr sz="900" b="0" i="0">
+                <a:solidFill>
+                  <a:srgbClr val="595959"/>
+                </a:solidFill>
+                <a:latin typeface="Arial"/>
+              </a:rPr>
+              <a:t>www.itu.int</a:t>
             </a:r>
           </a:p>
         </p:txBody>
@@ -13544,21 +12024,74 @@
                 </a:solidFill>
                 <a:latin typeface="Arial"/>
               </a:rPr>
-              <a:t>Design for the second year now, while you have the minister's attention</a:t>
+              <a:t>Four things quietly kill them — usually in the second year</a:t>
             </a:r>
           </a:p>
         </p:txBody>
       </p:sp>
       <p:sp>
         <p:nvSpPr>
-          <p:cNvPr id="4" name="TextBox 3"/>
+          <p:cNvPr id="4" name="Oval 3"/>
+          <p:cNvSpPr/>
+          <p:nvPr/>
+        </p:nvSpPr>
+        <p:spPr>
+          <a:xfrm>
+            <a:off x="621792" y="1508760"/>
+            <a:ext cx="310896" cy="310896"/>
+          </a:xfrm>
+          <a:prstGeom prst="ellipse">
+            <a:avLst/>
+          </a:prstGeom>
+          <a:solidFill>
+            <a:srgbClr val="009CD6"/>
+          </a:solidFill>
+          <a:ln>
+            <a:noFill/>
+          </a:ln>
+          <a:effectLst/>
+        </p:spPr>
+        <p:style>
+          <a:lnRef idx="1">
+            <a:schemeClr val="accent1"/>
+          </a:lnRef>
+          <a:fillRef idx="3">
+            <a:schemeClr val="accent1"/>
+          </a:fillRef>
+          <a:effectRef idx="2">
+            <a:schemeClr val="accent1"/>
+          </a:effectRef>
+          <a:fontRef idx="minor">
+            <a:schemeClr val="lt1"/>
+          </a:fontRef>
+        </p:style>
+        <p:txBody>
+          <a:bodyPr rtlCol="0" anchor="ctr" lIns="0" rIns="0" tIns="0" bIns="0" wrap="square"/>
+          <a:lstStyle/>
+          <a:p>
+            <a:pPr algn="ctr"/>
+            <a:r>
+              <a:rPr sz="1300" b="1" i="0">
+                <a:solidFill>
+                  <a:srgbClr val="FFFFFF"/>
+                </a:solidFill>
+                <a:latin typeface="Arial"/>
+              </a:rPr>
+              <a:t>1</a:t>
+            </a:r>
+          </a:p>
+        </p:txBody>
+      </p:sp>
+      <p:sp>
+        <p:nvSpPr>
+          <p:cNvPr id="5" name="TextBox 4"/>
           <p:cNvSpPr txBox="1"/>
           <p:nvPr/>
         </p:nvSpPr>
         <p:spPr>
           <a:xfrm>
-            <a:off x="658368" y="1600200"/>
-            <a:ext cx="10881360" cy="2194560"/>
+            <a:off x="1115568" y="1463040"/>
+            <a:ext cx="10527487" cy="1028699"/>
           </a:xfrm>
           <a:prstGeom prst="rect">
             <a:avLst/>
@@ -13573,55 +12106,53 @@
           <a:p>
             <a:pPr>
               <a:spcAft>
-                <a:spcPts val="1200"/>
+                <a:spcPts val="300"/>
               </a:spcAft>
             </a:pPr>
             <a:r>
-              <a:rPr sz="2000" b="0" i="0">
+              <a:rPr sz="1900" b="1" i="0">
                 <a:solidFill>
                   <a:srgbClr val="1A1A1A"/>
                 </a:solidFill>
                 <a:latin typeface="Arial"/>
               </a:rPr>
-              <a:t>Get the team's protection in writing. Make the governance mandate legal, not just a memo. Secure a multi-year envelope, not an annual line.</a:t>
+              <a:t>The team is pulled onto the urgent flagship</a:t>
             </a:r>
           </a:p>
           <a:p>
             <a:pPr>
               <a:spcAft>
-                <a:spcPts val="1200"/>
+                <a:spcPts val="300"/>
               </a:spcAft>
             </a:pPr>
             <a:r>
-              <a:rPr sz="2000" b="0" i="0">
+              <a:rPr sz="1550" b="0" i="0">
                 <a:solidFill>
-                  <a:srgbClr val="1A1A1A"/>
+                  <a:srgbClr val="595959"/>
                 </a:solidFill>
                 <a:latin typeface="Arial"/>
               </a:rPr>
-              <a:t>And plan to re-commit all of it when the sponsor changes, because the next minister will not feel bound by the last one's promises.</a:t>
+              <a:t>The architecture work simply stops.</a:t>
             </a:r>
           </a:p>
         </p:txBody>
       </p:sp>
       <p:sp>
         <p:nvSpPr>
-          <p:cNvPr id="5" name="Rounded Rectangle 4"/>
+          <p:cNvPr id="6" name="Rectangle 5"/>
           <p:cNvSpPr/>
           <p:nvPr/>
         </p:nvSpPr>
         <p:spPr>
           <a:xfrm>
-            <a:off x="658368" y="3977639"/>
-            <a:ext cx="10881360" cy="1325880"/>
-          </a:xfrm>
-          <a:prstGeom prst="roundRect">
-            <a:avLst>
-              <a:gd name="adj" fmla="val 4500"/>
-            </a:avLst>
+            <a:off x="621792" y="2496312"/>
+            <a:ext cx="10881360" cy="12700"/>
+          </a:xfrm>
+          <a:prstGeom prst="rect">
+            <a:avLst/>
           </a:prstGeom>
           <a:solidFill>
-            <a:srgbClr val="E5F5FB"/>
+            <a:srgbClr val="DDECF4"/>
           </a:solidFill>
           <a:ln>
             <a:noFill/>
@@ -13652,14 +12183,67 @@
       </p:sp>
       <p:sp>
         <p:nvSpPr>
-          <p:cNvPr id="6" name="TextBox 5"/>
+          <p:cNvPr id="7" name="Oval 6"/>
+          <p:cNvSpPr/>
+          <p:nvPr/>
+        </p:nvSpPr>
+        <p:spPr>
+          <a:xfrm>
+            <a:off x="621792" y="2583179"/>
+            <a:ext cx="310896" cy="310896"/>
+          </a:xfrm>
+          <a:prstGeom prst="ellipse">
+            <a:avLst/>
+          </a:prstGeom>
+          <a:solidFill>
+            <a:srgbClr val="009CD6"/>
+          </a:solidFill>
+          <a:ln>
+            <a:noFill/>
+          </a:ln>
+          <a:effectLst/>
+        </p:spPr>
+        <p:style>
+          <a:lnRef idx="1">
+            <a:schemeClr val="accent1"/>
+          </a:lnRef>
+          <a:fillRef idx="3">
+            <a:schemeClr val="accent1"/>
+          </a:fillRef>
+          <a:effectRef idx="2">
+            <a:schemeClr val="accent1"/>
+          </a:effectRef>
+          <a:fontRef idx="minor">
+            <a:schemeClr val="lt1"/>
+          </a:fontRef>
+        </p:style>
+        <p:txBody>
+          <a:bodyPr rtlCol="0" anchor="ctr" lIns="0" rIns="0" tIns="0" bIns="0" wrap="square"/>
+          <a:lstStyle/>
+          <a:p>
+            <a:pPr algn="ctr"/>
+            <a:r>
+              <a:rPr sz="1300" b="1" i="0">
+                <a:solidFill>
+                  <a:srgbClr val="FFFFFF"/>
+                </a:solidFill>
+                <a:latin typeface="Arial"/>
+              </a:rPr>
+              <a:t>2</a:t>
+            </a:r>
+          </a:p>
+        </p:txBody>
+      </p:sp>
+      <p:sp>
+        <p:nvSpPr>
+          <p:cNvPr id="8" name="TextBox 7"/>
           <p:cNvSpPr txBox="1"/>
           <p:nvPr/>
         </p:nvSpPr>
         <p:spPr>
           <a:xfrm>
-            <a:off x="859536" y="4169663"/>
-            <a:ext cx="10479024" cy="1051560"/>
+            <a:off x="1115568" y="2537460"/>
+            <a:ext cx="10527487" cy="1028699"/>
           </a:xfrm>
           <a:prstGeom prst="rect">
             <a:avLst/>
@@ -13674,24 +12258,378 @@
           <a:p>
             <a:pPr>
               <a:spcAft>
-                <a:spcPts val="700"/>
+                <a:spcPts val="300"/>
               </a:spcAft>
             </a:pPr>
             <a:r>
-              <a:rPr sz="2300" b="1" i="0">
+              <a:rPr sz="1900" b="1" i="0">
+                <a:solidFill>
+                  <a:srgbClr val="1A1A1A"/>
+                </a:solidFill>
+                <a:latin typeface="Arial"/>
+              </a:rPr>
+              <a:t>The sponsor changes</a:t>
+            </a:r>
+          </a:p>
+          <a:p>
+            <a:pPr>
+              <a:spcAft>
+                <a:spcPts val="300"/>
+              </a:spcAft>
+            </a:pPr>
+            <a:r>
+              <a:rPr sz="1550" b="0" i="0">
+                <a:solidFill>
+                  <a:srgbClr val="595959"/>
+                </a:solidFill>
+                <a:latin typeface="Arial"/>
+              </a:rPr>
+              <a:t>The successor has their own priorities.</a:t>
+            </a:r>
+          </a:p>
+        </p:txBody>
+      </p:sp>
+      <p:sp>
+        <p:nvSpPr>
+          <p:cNvPr id="9" name="Rectangle 8"/>
+          <p:cNvSpPr/>
+          <p:nvPr/>
+        </p:nvSpPr>
+        <p:spPr>
+          <a:xfrm>
+            <a:off x="621792" y="3570732"/>
+            <a:ext cx="10881360" cy="12700"/>
+          </a:xfrm>
+          <a:prstGeom prst="rect">
+            <a:avLst/>
+          </a:prstGeom>
+          <a:solidFill>
+            <a:srgbClr val="DDECF4"/>
+          </a:solidFill>
+          <a:ln>
+            <a:noFill/>
+          </a:ln>
+          <a:effectLst/>
+        </p:spPr>
+        <p:style>
+          <a:lnRef idx="1">
+            <a:schemeClr val="accent1"/>
+          </a:lnRef>
+          <a:fillRef idx="3">
+            <a:schemeClr val="accent1"/>
+          </a:fillRef>
+          <a:effectRef idx="2">
+            <a:schemeClr val="accent1"/>
+          </a:effectRef>
+          <a:fontRef idx="minor">
+            <a:schemeClr val="lt1"/>
+          </a:fontRef>
+        </p:style>
+        <p:txBody>
+          <a:bodyPr rtlCol="0" anchor="ctr"/>
+          <a:lstStyle/>
+          <a:p>
+            <a:pPr algn="ctr"/>
+          </a:p>
+        </p:txBody>
+      </p:sp>
+      <p:sp>
+        <p:nvSpPr>
+          <p:cNvPr id="10" name="Oval 9"/>
+          <p:cNvSpPr/>
+          <p:nvPr/>
+        </p:nvSpPr>
+        <p:spPr>
+          <a:xfrm>
+            <a:off x="621792" y="3657599"/>
+            <a:ext cx="310896" cy="310896"/>
+          </a:xfrm>
+          <a:prstGeom prst="ellipse">
+            <a:avLst/>
+          </a:prstGeom>
+          <a:solidFill>
+            <a:srgbClr val="009CD6"/>
+          </a:solidFill>
+          <a:ln>
+            <a:noFill/>
+          </a:ln>
+          <a:effectLst/>
+        </p:spPr>
+        <p:style>
+          <a:lnRef idx="1">
+            <a:schemeClr val="accent1"/>
+          </a:lnRef>
+          <a:fillRef idx="3">
+            <a:schemeClr val="accent1"/>
+          </a:fillRef>
+          <a:effectRef idx="2">
+            <a:schemeClr val="accent1"/>
+          </a:effectRef>
+          <a:fontRef idx="minor">
+            <a:schemeClr val="lt1"/>
+          </a:fontRef>
+        </p:style>
+        <p:txBody>
+          <a:bodyPr rtlCol="0" anchor="ctr" lIns="0" rIns="0" tIns="0" bIns="0" wrap="square"/>
+          <a:lstStyle/>
+          <a:p>
+            <a:pPr algn="ctr"/>
+            <a:r>
+              <a:rPr sz="1300" b="1" i="0">
+                <a:solidFill>
+                  <a:srgbClr val="FFFFFF"/>
+                </a:solidFill>
+                <a:latin typeface="Arial"/>
+              </a:rPr>
+              <a:t>3</a:t>
+            </a:r>
+          </a:p>
+        </p:txBody>
+      </p:sp>
+      <p:sp>
+        <p:nvSpPr>
+          <p:cNvPr id="11" name="TextBox 10"/>
+          <p:cNvSpPr txBox="1"/>
+          <p:nvPr/>
+        </p:nvSpPr>
+        <p:spPr>
+          <a:xfrm>
+            <a:off x="1115568" y="3611879"/>
+            <a:ext cx="10527487" cy="1028699"/>
+          </a:xfrm>
+          <a:prstGeom prst="rect">
+            <a:avLst/>
+          </a:prstGeom>
+          <a:noFill/>
+        </p:spPr>
+        <p:txBody>
+          <a:bodyPr wrap="square">
+            <a:spAutoFit/>
+          </a:bodyPr>
+          <a:lstStyle/>
+          <a:p>
+            <a:pPr>
+              <a:spcAft>
+                <a:spcPts val="300"/>
+              </a:spcAft>
+            </a:pPr>
+            <a:r>
+              <a:rPr sz="1900" b="1" i="0">
+                <a:solidFill>
+                  <a:srgbClr val="1A1A1A"/>
+                </a:solidFill>
+                <a:latin typeface="Arial"/>
+              </a:rPr>
+              <a:t>Governance drifts to advisory under delivery pressure</a:t>
+            </a:r>
+          </a:p>
+          <a:p>
+            <a:pPr>
+              <a:spcAft>
+                <a:spcPts val="300"/>
+              </a:spcAft>
+            </a:pPr>
+            <a:r>
+              <a:rPr sz="1550" b="0" i="0">
+                <a:solidFill>
+                  <a:srgbClr val="595959"/>
+                </a:solidFill>
+                <a:latin typeface="Arial"/>
+              </a:rPr>
+              <a:t>One powerful project through, then another, until its "no" means nothing.</a:t>
+            </a:r>
+          </a:p>
+        </p:txBody>
+      </p:sp>
+      <p:sp>
+        <p:nvSpPr>
+          <p:cNvPr id="12" name="Rectangle 11"/>
+          <p:cNvSpPr/>
+          <p:nvPr/>
+        </p:nvSpPr>
+        <p:spPr>
+          <a:xfrm>
+            <a:off x="621792" y="4645152"/>
+            <a:ext cx="10881360" cy="12700"/>
+          </a:xfrm>
+          <a:prstGeom prst="rect">
+            <a:avLst/>
+          </a:prstGeom>
+          <a:solidFill>
+            <a:srgbClr val="DDECF4"/>
+          </a:solidFill>
+          <a:ln>
+            <a:noFill/>
+          </a:ln>
+          <a:effectLst/>
+        </p:spPr>
+        <p:style>
+          <a:lnRef idx="1">
+            <a:schemeClr val="accent1"/>
+          </a:lnRef>
+          <a:fillRef idx="3">
+            <a:schemeClr val="accent1"/>
+          </a:fillRef>
+          <a:effectRef idx="2">
+            <a:schemeClr val="accent1"/>
+          </a:effectRef>
+          <a:fontRef idx="minor">
+            <a:schemeClr val="lt1"/>
+          </a:fontRef>
+        </p:style>
+        <p:txBody>
+          <a:bodyPr rtlCol="0" anchor="ctr"/>
+          <a:lstStyle/>
+          <a:p>
+            <a:pPr algn="ctr"/>
+          </a:p>
+        </p:txBody>
+      </p:sp>
+      <p:sp>
+        <p:nvSpPr>
+          <p:cNvPr id="13" name="Oval 12"/>
+          <p:cNvSpPr/>
+          <p:nvPr/>
+        </p:nvSpPr>
+        <p:spPr>
+          <a:xfrm>
+            <a:off x="621792" y="4732020"/>
+            <a:ext cx="310896" cy="310896"/>
+          </a:xfrm>
+          <a:prstGeom prst="ellipse">
+            <a:avLst/>
+          </a:prstGeom>
+          <a:solidFill>
+            <a:srgbClr val="009CD6"/>
+          </a:solidFill>
+          <a:ln>
+            <a:noFill/>
+          </a:ln>
+          <a:effectLst/>
+        </p:spPr>
+        <p:style>
+          <a:lnRef idx="1">
+            <a:schemeClr val="accent1"/>
+          </a:lnRef>
+          <a:fillRef idx="3">
+            <a:schemeClr val="accent1"/>
+          </a:fillRef>
+          <a:effectRef idx="2">
+            <a:schemeClr val="accent1"/>
+          </a:effectRef>
+          <a:fontRef idx="minor">
+            <a:schemeClr val="lt1"/>
+          </a:fontRef>
+        </p:style>
+        <p:txBody>
+          <a:bodyPr rtlCol="0" anchor="ctr" lIns="0" rIns="0" tIns="0" bIns="0" wrap="square"/>
+          <a:lstStyle/>
+          <a:p>
+            <a:pPr algn="ctr"/>
+            <a:r>
+              <a:rPr sz="1300" b="1" i="0">
+                <a:solidFill>
+                  <a:srgbClr val="FFFFFF"/>
+                </a:solidFill>
+                <a:latin typeface="Arial"/>
+              </a:rPr>
+              <a:t>4</a:t>
+            </a:r>
+          </a:p>
+        </p:txBody>
+      </p:sp>
+      <p:sp>
+        <p:nvSpPr>
+          <p:cNvPr id="14" name="TextBox 13"/>
+          <p:cNvSpPr txBox="1"/>
+          <p:nvPr/>
+        </p:nvSpPr>
+        <p:spPr>
+          <a:xfrm>
+            <a:off x="1115568" y="4686300"/>
+            <a:ext cx="10527487" cy="1028699"/>
+          </a:xfrm>
+          <a:prstGeom prst="rect">
+            <a:avLst/>
+          </a:prstGeom>
+          <a:noFill/>
+        </p:spPr>
+        <p:txBody>
+          <a:bodyPr wrap="square">
+            <a:spAutoFit/>
+          </a:bodyPr>
+          <a:lstStyle/>
+          <a:p>
+            <a:pPr>
+              <a:spcAft>
+                <a:spcPts val="300"/>
+              </a:spcAft>
+            </a:pPr>
+            <a:r>
+              <a:rPr sz="1900" b="1" i="0">
+                <a:solidFill>
+                  <a:srgbClr val="1A1A1A"/>
+                </a:solidFill>
+                <a:latin typeface="Arial"/>
+              </a:rPr>
+              <a:t>Funding becomes an annual favour</a:t>
+            </a:r>
+          </a:p>
+          <a:p>
+            <a:pPr>
+              <a:spcAft>
+                <a:spcPts val="300"/>
+              </a:spcAft>
+            </a:pPr>
+            <a:r>
+              <a:rPr sz="1550" b="0" i="0">
+                <a:solidFill>
+                  <a:srgbClr val="595959"/>
+                </a:solidFill>
+                <a:latin typeface="Arial"/>
+              </a:rPr>
+              <a:t>One budget cycle removes it.</a:t>
+            </a:r>
+          </a:p>
+        </p:txBody>
+      </p:sp>
+      <p:sp>
+        <p:nvSpPr>
+          <p:cNvPr id="15" name="TextBox 14"/>
+          <p:cNvSpPr txBox="1"/>
+          <p:nvPr/>
+        </p:nvSpPr>
+        <p:spPr>
+          <a:xfrm>
+            <a:off x="658368" y="5870448"/>
+            <a:ext cx="10881360" cy="548640"/>
+          </a:xfrm>
+          <a:prstGeom prst="rect">
+            <a:avLst/>
+          </a:prstGeom>
+          <a:noFill/>
+        </p:spPr>
+        <p:txBody>
+          <a:bodyPr wrap="square">
+            <a:spAutoFit/>
+          </a:bodyPr>
+          <a:lstStyle/>
+          <a:p>
+            <a:r>
+              <a:rPr sz="1550" b="1" i="0">
                 <a:solidFill>
                   <a:srgbClr val="006E96"/>
                 </a:solidFill>
                 <a:latin typeface="Arial"/>
               </a:rPr>
-              <a:t>Not afterthoughts to add if the programme survives. They are how it survives.</a:t>
+              <a:t>None of them is dramatic. Each one is a slow fade.</a:t>
             </a:r>
           </a:p>
         </p:txBody>
       </p:sp>
       <p:sp>
         <p:nvSpPr>
-          <p:cNvPr id="7" name="TextBox 6"/>
+          <p:cNvPr id="16" name="TextBox 15"/>
           <p:cNvSpPr txBox="1"/>
           <p:nvPr/>
         </p:nvSpPr>
@@ -13732,6 +12670,546 @@
 </file>
 
 <file path=ppt/slides/slide14.xml><?xml version="1.0" encoding="utf-8"?>
+<p:sld xmlns:a="http://schemas.openxmlformats.org/drawingml/2006/main" xmlns:p="http://schemas.openxmlformats.org/presentationml/2006/main" xmlns:r="http://schemas.openxmlformats.org/officeDocument/2006/relationships">
+  <p:cSld>
+    <p:spTree>
+      <p:nvGrpSpPr>
+        <p:cNvPr id="1" name=""/>
+        <p:cNvGrpSpPr/>
+        <p:nvPr/>
+      </p:nvGrpSpPr>
+      <p:grpSpPr/>
+      <p:sp>
+        <p:nvSpPr>
+          <p:cNvPr id="2" name="Rectangle 1"/>
+          <p:cNvSpPr/>
+          <p:nvPr/>
+        </p:nvSpPr>
+        <p:spPr>
+          <a:xfrm>
+            <a:off x="457200" y="384048"/>
+            <a:ext cx="45720" cy="256032"/>
+          </a:xfrm>
+          <a:prstGeom prst="rect">
+            <a:avLst/>
+          </a:prstGeom>
+          <a:solidFill>
+            <a:srgbClr val="009CD6"/>
+          </a:solidFill>
+          <a:ln>
+            <a:noFill/>
+          </a:ln>
+          <a:effectLst/>
+        </p:spPr>
+        <p:style>
+          <a:lnRef idx="1">
+            <a:schemeClr val="accent1"/>
+          </a:lnRef>
+          <a:fillRef idx="3">
+            <a:schemeClr val="accent1"/>
+          </a:fillRef>
+          <a:effectRef idx="2">
+            <a:schemeClr val="accent1"/>
+          </a:effectRef>
+          <a:fontRef idx="minor">
+            <a:schemeClr val="lt1"/>
+          </a:fontRef>
+        </p:style>
+        <p:txBody>
+          <a:bodyPr rtlCol="0" anchor="ctr"/>
+          <a:lstStyle/>
+          <a:p>
+            <a:pPr algn="ctr"/>
+          </a:p>
+        </p:txBody>
+      </p:sp>
+      <p:sp>
+        <p:nvSpPr>
+          <p:cNvPr id="3" name="TextBox 2"/>
+          <p:cNvSpPr txBox="1"/>
+          <p:nvPr/>
+        </p:nvSpPr>
+        <p:spPr>
+          <a:xfrm>
+            <a:off x="621792" y="274320"/>
+            <a:ext cx="11247120" cy="914400"/>
+          </a:xfrm>
+          <a:prstGeom prst="rect">
+            <a:avLst/>
+          </a:prstGeom>
+          <a:noFill/>
+        </p:spPr>
+        <p:txBody>
+          <a:bodyPr wrap="square">
+            <a:spAutoFit/>
+          </a:bodyPr>
+          <a:lstStyle/>
+          <a:p>
+            <a:r>
+              <a:rPr sz="2800" b="1" i="0">
+                <a:solidFill>
+                  <a:srgbClr val="1A1A1A"/>
+                </a:solidFill>
+                <a:latin typeface="Arial"/>
+              </a:rPr>
+              <a:t>Not one of the killers is about technology</a:t>
+            </a:r>
+          </a:p>
+        </p:txBody>
+      </p:sp>
+      <p:sp>
+        <p:nvSpPr>
+          <p:cNvPr id="4" name="TextBox 3"/>
+          <p:cNvSpPr txBox="1"/>
+          <p:nvPr/>
+        </p:nvSpPr>
+        <p:spPr>
+          <a:xfrm>
+            <a:off x="658368" y="1600200"/>
+            <a:ext cx="10881360" cy="2194560"/>
+          </a:xfrm>
+          <a:prstGeom prst="rect">
+            <a:avLst/>
+          </a:prstGeom>
+          <a:noFill/>
+        </p:spPr>
+        <p:txBody>
+          <a:bodyPr wrap="square">
+            <a:spAutoFit/>
+          </a:bodyPr>
+          <a:lstStyle/>
+          <a:p>
+            <a:pPr>
+              <a:spcAft>
+                <a:spcPts val="1200"/>
+              </a:spcAft>
+            </a:pPr>
+            <a:r>
+              <a:rPr sz="2000" b="0" i="0">
+                <a:solidFill>
+                  <a:srgbClr val="1A1A1A"/>
+                </a:solidFill>
+                <a:latin typeface="Arial"/>
+              </a:rPr>
+              <a:t>They are about people, authority and money — protecting the team, securing the mandate, defending the governance, locking in the funding.</a:t>
+            </a:r>
+          </a:p>
+          <a:p>
+            <a:pPr>
+              <a:spcAft>
+                <a:spcPts val="1200"/>
+              </a:spcAft>
+            </a:pPr>
+            <a:r>
+              <a:rPr sz="2000" b="0" i="0">
+                <a:solidFill>
+                  <a:srgbClr val="1A1A1A"/>
+                </a:solidFill>
+                <a:latin typeface="Arial"/>
+              </a:rPr>
+              <a:t>Which is the good news, because those are what you can influence. The chief architect cannot protect their own team or secure their own five-year budget. Only the strategist who commissioned the work can.</a:t>
+            </a:r>
+          </a:p>
+        </p:txBody>
+      </p:sp>
+      <p:sp>
+        <p:nvSpPr>
+          <p:cNvPr id="5" name="Rounded Rectangle 4"/>
+          <p:cNvSpPr/>
+          <p:nvPr/>
+        </p:nvSpPr>
+        <p:spPr>
+          <a:xfrm>
+            <a:off x="658368" y="3977639"/>
+            <a:ext cx="10881360" cy="1325880"/>
+          </a:xfrm>
+          <a:prstGeom prst="roundRect">
+            <a:avLst>
+              <a:gd name="adj" fmla="val 4500"/>
+            </a:avLst>
+          </a:prstGeom>
+          <a:solidFill>
+            <a:srgbClr val="E5F5FB"/>
+          </a:solidFill>
+          <a:ln>
+            <a:noFill/>
+          </a:ln>
+          <a:effectLst/>
+        </p:spPr>
+        <p:style>
+          <a:lnRef idx="1">
+            <a:schemeClr val="accent1"/>
+          </a:lnRef>
+          <a:fillRef idx="3">
+            <a:schemeClr val="accent1"/>
+          </a:fillRef>
+          <a:effectRef idx="2">
+            <a:schemeClr val="accent1"/>
+          </a:effectRef>
+          <a:fontRef idx="minor">
+            <a:schemeClr val="lt1"/>
+          </a:fontRef>
+        </p:style>
+        <p:txBody>
+          <a:bodyPr rtlCol="0" anchor="ctr"/>
+          <a:lstStyle/>
+          <a:p>
+            <a:pPr algn="ctr"/>
+          </a:p>
+        </p:txBody>
+      </p:sp>
+      <p:sp>
+        <p:nvSpPr>
+          <p:cNvPr id="6" name="TextBox 5"/>
+          <p:cNvSpPr txBox="1"/>
+          <p:nvPr/>
+        </p:nvSpPr>
+        <p:spPr>
+          <a:xfrm>
+            <a:off x="859536" y="4169663"/>
+            <a:ext cx="10479024" cy="1051560"/>
+          </a:xfrm>
+          <a:prstGeom prst="rect">
+            <a:avLst/>
+          </a:prstGeom>
+          <a:noFill/>
+        </p:spPr>
+        <p:txBody>
+          <a:bodyPr wrap="square">
+            <a:spAutoFit/>
+          </a:bodyPr>
+          <a:lstStyle/>
+          <a:p>
+            <a:pPr>
+              <a:spcAft>
+                <a:spcPts val="700"/>
+              </a:spcAft>
+            </a:pPr>
+            <a:r>
+              <a:rPr sz="2300" b="1" i="0">
+                <a:solidFill>
+                  <a:srgbClr val="006E96"/>
+                </a:solidFill>
+                <a:latin typeface="Arial"/>
+              </a:rPr>
+              <a:t>The failures are organisational, which means they are yours to prevent.</a:t>
+            </a:r>
+          </a:p>
+        </p:txBody>
+      </p:sp>
+      <p:sp>
+        <p:nvSpPr>
+          <p:cNvPr id="7" name="TextBox 6"/>
+          <p:cNvSpPr txBox="1"/>
+          <p:nvPr/>
+        </p:nvSpPr>
+        <p:spPr>
+          <a:xfrm>
+            <a:off x="457200" y="6473952"/>
+            <a:ext cx="7772400" cy="292608"/>
+          </a:xfrm>
+          <a:prstGeom prst="rect">
+            <a:avLst/>
+          </a:prstGeom>
+          <a:noFill/>
+        </p:spPr>
+        <p:txBody>
+          <a:bodyPr wrap="square">
+            <a:spAutoFit/>
+          </a:bodyPr>
+          <a:lstStyle/>
+          <a:p>
+            <a:r>
+              <a:rPr sz="900" b="0" i="0">
+                <a:solidFill>
+                  <a:srgbClr val="595959"/>
+                </a:solidFill>
+                <a:latin typeface="Arial"/>
+              </a:rPr>
+              <a:t>5.2 · What the evidence says works — and what quietly kills these programmes</a:t>
+            </a:r>
+          </a:p>
+        </p:txBody>
+      </p:sp>
+    </p:spTree>
+  </p:cSld>
+  <p:clrMapOvr>
+    <a:masterClrMapping/>
+  </p:clrMapOvr>
+</p:sld>
+</file>
+
+<file path=ppt/slides/slide15.xml><?xml version="1.0" encoding="utf-8"?>
+<p:sld xmlns:a="http://schemas.openxmlformats.org/drawingml/2006/main" xmlns:p="http://schemas.openxmlformats.org/presentationml/2006/main" xmlns:r="http://schemas.openxmlformats.org/officeDocument/2006/relationships">
+  <p:cSld>
+    <p:spTree>
+      <p:nvGrpSpPr>
+        <p:cNvPr id="1" name=""/>
+        <p:cNvGrpSpPr/>
+        <p:nvPr/>
+      </p:nvGrpSpPr>
+      <p:grpSpPr/>
+      <p:sp>
+        <p:nvSpPr>
+          <p:cNvPr id="2" name="Rectangle 1"/>
+          <p:cNvSpPr/>
+          <p:nvPr/>
+        </p:nvSpPr>
+        <p:spPr>
+          <a:xfrm>
+            <a:off x="457200" y="384048"/>
+            <a:ext cx="45720" cy="256032"/>
+          </a:xfrm>
+          <a:prstGeom prst="rect">
+            <a:avLst/>
+          </a:prstGeom>
+          <a:solidFill>
+            <a:srgbClr val="009CD6"/>
+          </a:solidFill>
+          <a:ln>
+            <a:noFill/>
+          </a:ln>
+          <a:effectLst/>
+        </p:spPr>
+        <p:style>
+          <a:lnRef idx="1">
+            <a:schemeClr val="accent1"/>
+          </a:lnRef>
+          <a:fillRef idx="3">
+            <a:schemeClr val="accent1"/>
+          </a:fillRef>
+          <a:effectRef idx="2">
+            <a:schemeClr val="accent1"/>
+          </a:effectRef>
+          <a:fontRef idx="minor">
+            <a:schemeClr val="lt1"/>
+          </a:fontRef>
+        </p:style>
+        <p:txBody>
+          <a:bodyPr rtlCol="0" anchor="ctr"/>
+          <a:lstStyle/>
+          <a:p>
+            <a:pPr algn="ctr"/>
+          </a:p>
+        </p:txBody>
+      </p:sp>
+      <p:sp>
+        <p:nvSpPr>
+          <p:cNvPr id="3" name="TextBox 2"/>
+          <p:cNvSpPr txBox="1"/>
+          <p:nvPr/>
+        </p:nvSpPr>
+        <p:spPr>
+          <a:xfrm>
+            <a:off x="621792" y="274320"/>
+            <a:ext cx="11247120" cy="914400"/>
+          </a:xfrm>
+          <a:prstGeom prst="rect">
+            <a:avLst/>
+          </a:prstGeom>
+          <a:noFill/>
+        </p:spPr>
+        <p:txBody>
+          <a:bodyPr wrap="square">
+            <a:spAutoFit/>
+          </a:bodyPr>
+          <a:lstStyle/>
+          <a:p>
+            <a:r>
+              <a:rPr sz="2800" b="1" i="0">
+                <a:solidFill>
+                  <a:srgbClr val="1A1A1A"/>
+                </a:solidFill>
+                <a:latin typeface="Arial"/>
+              </a:rPr>
+              <a:t>Design for the second year now, while you have the minister's attention</a:t>
+            </a:r>
+          </a:p>
+        </p:txBody>
+      </p:sp>
+      <p:sp>
+        <p:nvSpPr>
+          <p:cNvPr id="4" name="TextBox 3"/>
+          <p:cNvSpPr txBox="1"/>
+          <p:nvPr/>
+        </p:nvSpPr>
+        <p:spPr>
+          <a:xfrm>
+            <a:off x="658368" y="1600200"/>
+            <a:ext cx="10881360" cy="2194560"/>
+          </a:xfrm>
+          <a:prstGeom prst="rect">
+            <a:avLst/>
+          </a:prstGeom>
+          <a:noFill/>
+        </p:spPr>
+        <p:txBody>
+          <a:bodyPr wrap="square">
+            <a:spAutoFit/>
+          </a:bodyPr>
+          <a:lstStyle/>
+          <a:p>
+            <a:pPr>
+              <a:spcAft>
+                <a:spcPts val="1200"/>
+              </a:spcAft>
+            </a:pPr>
+            <a:r>
+              <a:rPr sz="2000" b="0" i="0">
+                <a:solidFill>
+                  <a:srgbClr val="1A1A1A"/>
+                </a:solidFill>
+                <a:latin typeface="Arial"/>
+              </a:rPr>
+              <a:t>Get the team's protection in writing. Make the governance mandate legal, not just a memo. Secure a multi-year envelope, not an annual line.</a:t>
+            </a:r>
+          </a:p>
+          <a:p>
+            <a:pPr>
+              <a:spcAft>
+                <a:spcPts val="1200"/>
+              </a:spcAft>
+            </a:pPr>
+            <a:r>
+              <a:rPr sz="2000" b="0" i="0">
+                <a:solidFill>
+                  <a:srgbClr val="1A1A1A"/>
+                </a:solidFill>
+                <a:latin typeface="Arial"/>
+              </a:rPr>
+              <a:t>And plan to re-commit all of it when the sponsor changes, because the next minister will not feel bound by the last one's promises.</a:t>
+            </a:r>
+          </a:p>
+        </p:txBody>
+      </p:sp>
+      <p:sp>
+        <p:nvSpPr>
+          <p:cNvPr id="5" name="Rounded Rectangle 4"/>
+          <p:cNvSpPr/>
+          <p:nvPr/>
+        </p:nvSpPr>
+        <p:spPr>
+          <a:xfrm>
+            <a:off x="658368" y="3977639"/>
+            <a:ext cx="10881360" cy="1325880"/>
+          </a:xfrm>
+          <a:prstGeom prst="roundRect">
+            <a:avLst>
+              <a:gd name="adj" fmla="val 4500"/>
+            </a:avLst>
+          </a:prstGeom>
+          <a:solidFill>
+            <a:srgbClr val="E5F5FB"/>
+          </a:solidFill>
+          <a:ln>
+            <a:noFill/>
+          </a:ln>
+          <a:effectLst/>
+        </p:spPr>
+        <p:style>
+          <a:lnRef idx="1">
+            <a:schemeClr val="accent1"/>
+          </a:lnRef>
+          <a:fillRef idx="3">
+            <a:schemeClr val="accent1"/>
+          </a:fillRef>
+          <a:effectRef idx="2">
+            <a:schemeClr val="accent1"/>
+          </a:effectRef>
+          <a:fontRef idx="minor">
+            <a:schemeClr val="lt1"/>
+          </a:fontRef>
+        </p:style>
+        <p:txBody>
+          <a:bodyPr rtlCol="0" anchor="ctr"/>
+          <a:lstStyle/>
+          <a:p>
+            <a:pPr algn="ctr"/>
+          </a:p>
+        </p:txBody>
+      </p:sp>
+      <p:sp>
+        <p:nvSpPr>
+          <p:cNvPr id="6" name="TextBox 5"/>
+          <p:cNvSpPr txBox="1"/>
+          <p:nvPr/>
+        </p:nvSpPr>
+        <p:spPr>
+          <a:xfrm>
+            <a:off x="859536" y="4169663"/>
+            <a:ext cx="10479024" cy="1051560"/>
+          </a:xfrm>
+          <a:prstGeom prst="rect">
+            <a:avLst/>
+          </a:prstGeom>
+          <a:noFill/>
+        </p:spPr>
+        <p:txBody>
+          <a:bodyPr wrap="square">
+            <a:spAutoFit/>
+          </a:bodyPr>
+          <a:lstStyle/>
+          <a:p>
+            <a:pPr>
+              <a:spcAft>
+                <a:spcPts val="700"/>
+              </a:spcAft>
+            </a:pPr>
+            <a:r>
+              <a:rPr sz="2300" b="1" i="0">
+                <a:solidFill>
+                  <a:srgbClr val="006E96"/>
+                </a:solidFill>
+                <a:latin typeface="Arial"/>
+              </a:rPr>
+              <a:t>Not afterthoughts to add if the programme survives. They are how it survives.</a:t>
+            </a:r>
+          </a:p>
+        </p:txBody>
+      </p:sp>
+      <p:sp>
+        <p:nvSpPr>
+          <p:cNvPr id="7" name="TextBox 6"/>
+          <p:cNvSpPr txBox="1"/>
+          <p:nvPr/>
+        </p:nvSpPr>
+        <p:spPr>
+          <a:xfrm>
+            <a:off x="457200" y="6473952"/>
+            <a:ext cx="7772400" cy="292608"/>
+          </a:xfrm>
+          <a:prstGeom prst="rect">
+            <a:avLst/>
+          </a:prstGeom>
+          <a:noFill/>
+        </p:spPr>
+        <p:txBody>
+          <a:bodyPr wrap="square">
+            <a:spAutoFit/>
+          </a:bodyPr>
+          <a:lstStyle/>
+          <a:p>
+            <a:r>
+              <a:rPr sz="900" b="0" i="0">
+                <a:solidFill>
+                  <a:srgbClr val="595959"/>
+                </a:solidFill>
+                <a:latin typeface="Arial"/>
+              </a:rPr>
+              <a:t>5.2 · What the evidence says works — and what quietly kills these programmes</a:t>
+            </a:r>
+          </a:p>
+        </p:txBody>
+      </p:sp>
+    </p:spTree>
+  </p:cSld>
+  <p:clrMapOvr>
+    <a:masterClrMapping/>
+  </p:clrMapOvr>
+</p:sld>
+</file>
+
+<file path=ppt/slides/slide16.xml><?xml version="1.0" encoding="utf-8"?>
 <p:sld xmlns:a="http://schemas.openxmlformats.org/drawingml/2006/main" xmlns:p="http://schemas.openxmlformats.org/presentationml/2006/main" xmlns:r="http://schemas.openxmlformats.org/officeDocument/2006/relationships">
   <p:cSld>
     <p:spTree>
@@ -13974,7 +13452,7 @@
 </p:sld>
 </file>
 
-<file path=ppt/slides/slide15.xml><?xml version="1.0" encoding="utf-8"?>
+<file path=ppt/slides/slide17.xml><?xml version="1.0" encoding="utf-8"?>
 <p:sld xmlns:a="http://schemas.openxmlformats.org/drawingml/2006/main" xmlns:p="http://schemas.openxmlformats.org/presentationml/2006/main" xmlns:r="http://schemas.openxmlformats.org/officeDocument/2006/relationships">
   <p:cSld>
     <p:spTree>

--- a/10-Knowledge-Products/KP1-GEA/videos/module_5/en/decks/KP1_M5_5.2_Deck_v0.2.pptx
+++ b/10-Knowledge-Products/KP1-GEA/videos/module_5/en/decks/KP1_M5_5.2_Deck_v0.2.pptx
@@ -11718,7 +11718,7 @@
                 </a:solidFill>
                 <a:latin typeface="Arial"/>
               </a:rPr>
-              <a:t>~3 minutes · standalone video · voice-over on text slides</a:t>
+              <a:t>standalone video · voice-over on text slides</a:t>
             </a:r>
           </a:p>
         </p:txBody>

--- a/10-Knowledge-Products/KP1-GEA/videos/module_5/en/decks/KP1_M5_5.2_Deck_v0.2.pptx
+++ b/10-Knowledge-Products/KP1-GEA/videos/module_5/en/decks/KP1_M5_5.2_Deck_v0.2.pptx
@@ -11582,7 +11582,7 @@
                 </a:solidFill>
                 <a:latin typeface="Arial"/>
               </a:rPr>
-              <a:t>KP1 · MODULE 5 · VIDEO 5.2</a:t>
+              <a:t>MODULE 5 · VIDEO 5.2</a:t>
             </a:r>
           </a:p>
         </p:txBody>
